--- a/public/lessons/year-6-maths/summer/week-29/solve-mixed-measure-problems/teaching-powerpoint-v1.pptx
+++ b/public/lessons/year-6-maths/summer/week-29/solve-mixed-measure-problems/teaching-powerpoint-v1.pptx
@@ -2,24 +2,24 @@
 <file path=ppt/presentation.xml><?xml version="1.0" encoding="utf-8"?>
 <p:presentation xmlns:p="http://schemas.openxmlformats.org/presentationml/2006/main">
   <p:sldMasterIdLst>
-    <p:sldMasterId xmlns:r="http://schemas.openxmlformats.org/officeDocument/2006/relationships" id="2147483648" r:id="R84ac2780ed7a4fa4"/>
+    <p:sldMasterId xmlns:r="http://schemas.openxmlformats.org/officeDocument/2006/relationships" id="2147483648" r:id="R0da2f795529c40ee"/>
   </p:sldMasterIdLst>
   <p:notesMasterIdLst>
-    <p:notesMasterId xmlns:r="http://schemas.openxmlformats.org/officeDocument/2006/relationships" r:id="Rcc1a6984d29b487a"/>
+    <p:notesMasterId xmlns:r="http://schemas.openxmlformats.org/officeDocument/2006/relationships" r:id="R7c02c010c2414a81"/>
   </p:notesMasterIdLst>
   <p:sldIdLst>
-    <p:sldId xmlns:r="http://schemas.openxmlformats.org/officeDocument/2006/relationships" id="256" r:id="Raf28b0e47a474e70"/>
-    <p:sldId xmlns:r="http://schemas.openxmlformats.org/officeDocument/2006/relationships" id="257" r:id="R0de02c6b12434dee"/>
-    <p:sldId xmlns:r="http://schemas.openxmlformats.org/officeDocument/2006/relationships" id="258" r:id="R32c3a90248354dbb"/>
-    <p:sldId xmlns:r="http://schemas.openxmlformats.org/officeDocument/2006/relationships" id="259" r:id="R35b5e298d8c64759"/>
-    <p:sldId xmlns:r="http://schemas.openxmlformats.org/officeDocument/2006/relationships" id="260" r:id="R5f11bede660943de"/>
-    <p:sldId xmlns:r="http://schemas.openxmlformats.org/officeDocument/2006/relationships" id="261" r:id="Rc03c8517ae8a4322"/>
-    <p:sldId xmlns:r="http://schemas.openxmlformats.org/officeDocument/2006/relationships" id="262" r:id="Rfae28e32212540c1"/>
-    <p:sldId xmlns:r="http://schemas.openxmlformats.org/officeDocument/2006/relationships" id="263" r:id="R174a54e096424b89"/>
-    <p:sldId xmlns:r="http://schemas.openxmlformats.org/officeDocument/2006/relationships" id="264" r:id="R7bdf5902e4294b7c"/>
-    <p:sldId xmlns:r="http://schemas.openxmlformats.org/officeDocument/2006/relationships" id="265" r:id="R92b85c88f4674ecf"/>
-    <p:sldId xmlns:r="http://schemas.openxmlformats.org/officeDocument/2006/relationships" id="266" r:id="Rbf2610ec92074c18"/>
-    <p:sldId xmlns:r="http://schemas.openxmlformats.org/officeDocument/2006/relationships" id="267" r:id="R0a8698ac2eae4137"/>
+    <p:sldId xmlns:r="http://schemas.openxmlformats.org/officeDocument/2006/relationships" id="256" r:id="R26c38960e1e04069"/>
+    <p:sldId xmlns:r="http://schemas.openxmlformats.org/officeDocument/2006/relationships" id="257" r:id="R532cb59b36854f77"/>
+    <p:sldId xmlns:r="http://schemas.openxmlformats.org/officeDocument/2006/relationships" id="258" r:id="R42e5ce3d9f6b4be3"/>
+    <p:sldId xmlns:r="http://schemas.openxmlformats.org/officeDocument/2006/relationships" id="259" r:id="R578a7de14bf84131"/>
+    <p:sldId xmlns:r="http://schemas.openxmlformats.org/officeDocument/2006/relationships" id="260" r:id="R62ae0a7b4d79447a"/>
+    <p:sldId xmlns:r="http://schemas.openxmlformats.org/officeDocument/2006/relationships" id="261" r:id="R6b071fac4d424a67"/>
+    <p:sldId xmlns:r="http://schemas.openxmlformats.org/officeDocument/2006/relationships" id="262" r:id="Rf1df9f390df14e16"/>
+    <p:sldId xmlns:r="http://schemas.openxmlformats.org/officeDocument/2006/relationships" id="263" r:id="R592349b90189436d"/>
+    <p:sldId xmlns:r="http://schemas.openxmlformats.org/officeDocument/2006/relationships" id="264" r:id="Rc7ac593c9e8f4784"/>
+    <p:sldId xmlns:r="http://schemas.openxmlformats.org/officeDocument/2006/relationships" id="265" r:id="Rfe29bacd2fd3495e"/>
+    <p:sldId xmlns:r="http://schemas.openxmlformats.org/officeDocument/2006/relationships" id="266" r:id="R3e6a9303ffff4f6f"/>
+    <p:sldId xmlns:r="http://schemas.openxmlformats.org/officeDocument/2006/relationships" id="267" r:id="R97b838892c2d46f0"/>
   </p:sldIdLst>
   <p:sldSz cx="12192000" cy="6858000"/>
   <p:notesSz cx="6858000" cy="9144000"/>
@@ -523,7 +523,7 @@
           <a:lstStyle xmlns:a="http://schemas.openxmlformats.org/drawingml/2006/main"/>
           <a:p xmlns:a="http://schemas.openxmlformats.org/drawingml/2006/main">
             <a:r>
-              <a:t>Use after secure fluency or as the higher worksheet route. Accept different correct approaches when fully justified. Expected response: 244.8. The explanation must show why the method works.</a:t>
+              <a:t>Use after secure fluency or as the higher worksheet route. Accept different correct approaches when fully justified. Expected response: 220.8. The explanation must show why the method works.</a:t>
             </a:r>
           </a:p>
         </p:txBody>
@@ -873,7 +873,7 @@
           <a:lstStyle xmlns:a="http://schemas.openxmlformats.org/drawingml/2006/main"/>
           <a:p xmlns:a="http://schemas.openxmlformats.org/drawingml/2006/main">
             <a:r>
-              <a:t>I do. Reveal the question, setup and each calculation stage one click at a time. Pupils watch before copying. Model answer: 320 cm3.</a:t>
+              <a:t>I do. Reveal the question, then reveal each mathematical change one click at a time. Point to the numbers and operation that changed before moving to the next line. Final answer: 320 cm3.</a:t>
             </a:r>
           </a:p>
         </p:txBody>
@@ -1291,7 +1291,7 @@
   </p:cSld>
   <p:clrMap bg1="lt1" tx1="dk1" bg2="lt2" tx2="dk2" accent1="accent1" accent2="accent2" accent3="accent3" accent4="accent4" accent5="accent5" accent6="accent6" hlink="hlink" folHlink="folHlink"/>
   <p:sldLayoutIdLst>
-    <p:sldLayoutId xmlns:r="http://schemas.openxmlformats.org/officeDocument/2006/relationships" id="2147483649" r:id="R6eb93a470e864d50"/>
+    <p:sldLayoutId xmlns:r="http://schemas.openxmlformats.org/officeDocument/2006/relationships" id="2147483649" r:id="R599ef2b131fe4f51"/>
   </p:sldLayoutIdLst>
   <p:txStyles>
     <p:titleStyle>
@@ -1842,7 +1842,7 @@
           <p:cNvPr id="12" name="">
             <a:extLst xmlns:a="http://schemas.openxmlformats.org/drawingml/2006/main">
               <a:ext uri="{FF2B5EF4-FFF2-40B4-BE49-F238E27FC236}">
-                <a16:creationId xmlns:a16="http://schemas.microsoft.com/office/drawing/2014/main" id="{4EAA21D9-CDB1-43D1-8890-8E05CDA2AF22}"/>
+                <a16:creationId xmlns:a16="http://schemas.microsoft.com/office/drawing/2014/main" id="{664F5ABE-392B-4CF8-8F47-7C2E6E9DCF47}"/>
               </a:ext>
             </a:extLst>
           </p:cNvPr>
@@ -1874,7 +1874,7 @@
           <p:cNvPr id="2" name="">
             <a:extLst xmlns:a="http://schemas.openxmlformats.org/drawingml/2006/main">
               <a:ext uri="{FF2B5EF4-FFF2-40B4-BE49-F238E27FC236}">
-                <a16:creationId xmlns:a16="http://schemas.microsoft.com/office/drawing/2014/main" id="{EEDE7532-7182-4CB7-B125-A2BF7B0F28C4}"/>
+                <a16:creationId xmlns:a16="http://schemas.microsoft.com/office/drawing/2014/main" id="{3563195F-24C3-4488-BBE7-9F176A0F1B33}"/>
               </a:ext>
             </a:extLst>
           </p:cNvPr>
@@ -1931,7 +1931,7 @@
           <p:cNvPr id="3" name="">
             <a:extLst xmlns:a="http://schemas.openxmlformats.org/drawingml/2006/main">
               <a:ext uri="{FF2B5EF4-FFF2-40B4-BE49-F238E27FC236}">
-                <a16:creationId xmlns:a16="http://schemas.microsoft.com/office/drawing/2014/main" id="{B90B9C83-41A2-477C-845A-26D9EDC3DCE0}"/>
+                <a16:creationId xmlns:a16="http://schemas.microsoft.com/office/drawing/2014/main" id="{DECB0A26-DC71-410B-9BA3-FF7A4B197E39}"/>
               </a:ext>
             </a:extLst>
           </p:cNvPr>
@@ -1965,7 +1965,7 @@
           <p:cNvPr id="4" name="">
             <a:extLst xmlns:a="http://schemas.openxmlformats.org/drawingml/2006/main">
               <a:ext uri="{FF2B5EF4-FFF2-40B4-BE49-F238E27FC236}">
-                <a16:creationId xmlns:a16="http://schemas.microsoft.com/office/drawing/2014/main" id="{1774C565-03B1-415E-8B87-2ADA6091B758}"/>
+                <a16:creationId xmlns:a16="http://schemas.microsoft.com/office/drawing/2014/main" id="{019D9AB4-8EC7-48C7-9682-E23AA1D3DC36}"/>
               </a:ext>
             </a:extLst>
           </p:cNvPr>
@@ -2022,7 +2022,7 @@
           <p:cNvPr id="5" name="">
             <a:extLst xmlns:a="http://schemas.openxmlformats.org/drawingml/2006/main">
               <a:ext uri="{FF2B5EF4-FFF2-40B4-BE49-F238E27FC236}">
-                <a16:creationId xmlns:a16="http://schemas.microsoft.com/office/drawing/2014/main" id="{199C22AF-BB26-46C8-ACE0-711F0300283A}"/>
+                <a16:creationId xmlns:a16="http://schemas.microsoft.com/office/drawing/2014/main" id="{7D5867B2-D4E8-4426-93FB-325E2C46093F}"/>
               </a:ext>
             </a:extLst>
           </p:cNvPr>
@@ -2079,7 +2079,7 @@
           <p:cNvPr id="6" name="">
             <a:extLst xmlns:a="http://schemas.openxmlformats.org/drawingml/2006/main">
               <a:ext uri="{FF2B5EF4-FFF2-40B4-BE49-F238E27FC236}">
-                <a16:creationId xmlns:a16="http://schemas.microsoft.com/office/drawing/2014/main" id="{7BE18B78-DD7A-4479-B4B8-E9FADBEAE208}"/>
+                <a16:creationId xmlns:a16="http://schemas.microsoft.com/office/drawing/2014/main" id="{61EE7784-BB16-4960-8666-DECEEBF50A5E}"/>
               </a:ext>
             </a:extLst>
           </p:cNvPr>
@@ -2113,7 +2113,7 @@
           <p:cNvPr id="7" name="">
             <a:extLst xmlns:a="http://schemas.openxmlformats.org/drawingml/2006/main">
               <a:ext uri="{FF2B5EF4-FFF2-40B4-BE49-F238E27FC236}">
-                <a16:creationId xmlns:a16="http://schemas.microsoft.com/office/drawing/2014/main" id="{04A7B2DC-230C-4EEB-917F-52B9CE3DCC81}"/>
+                <a16:creationId xmlns:a16="http://schemas.microsoft.com/office/drawing/2014/main" id="{8B2DE4B6-25E8-4662-BCFD-58478C5C96B9}"/>
               </a:ext>
             </a:extLst>
           </p:cNvPr>
@@ -2170,7 +2170,7 @@
           <p:cNvPr id="8" name="">
             <a:extLst xmlns:a="http://schemas.openxmlformats.org/drawingml/2006/main">
               <a:ext uri="{FF2B5EF4-FFF2-40B4-BE49-F238E27FC236}">
-                <a16:creationId xmlns:a16="http://schemas.microsoft.com/office/drawing/2014/main" id="{6747A62C-E626-410E-8AC3-AC4A072B98EA}"/>
+                <a16:creationId xmlns:a16="http://schemas.microsoft.com/office/drawing/2014/main" id="{1AAB5F5E-157F-4E5F-8919-26DB97D61342}"/>
               </a:ext>
             </a:extLst>
           </p:cNvPr>
@@ -2227,7 +2227,7 @@
           <p:cNvPr id="9" name="">
             <a:extLst xmlns:a="http://schemas.openxmlformats.org/drawingml/2006/main">
               <a:ext uri="{FF2B5EF4-FFF2-40B4-BE49-F238E27FC236}">
-                <a16:creationId xmlns:a16="http://schemas.microsoft.com/office/drawing/2014/main" id="{78B4EC60-8EF8-4F66-B168-EF46A2B249C5}"/>
+                <a16:creationId xmlns:a16="http://schemas.microsoft.com/office/drawing/2014/main" id="{E72D111D-CC01-4151-8F26-AE50610F87A2}"/>
               </a:ext>
             </a:extLst>
           </p:cNvPr>
@@ -2284,7 +2284,7 @@
           <p:cNvPr id="10" name="">
             <a:extLst xmlns:a="http://schemas.openxmlformats.org/drawingml/2006/main">
               <a:ext uri="{FF2B5EF4-FFF2-40B4-BE49-F238E27FC236}">
-                <a16:creationId xmlns:a16="http://schemas.microsoft.com/office/drawing/2014/main" id="{BED6F36F-1F0F-4943-BD05-6E56063010F8}"/>
+                <a16:creationId xmlns:a16="http://schemas.microsoft.com/office/drawing/2014/main" id="{DBBDA1F5-8C3B-4A29-BCDD-EFBC87043AA4}"/>
               </a:ext>
             </a:extLst>
           </p:cNvPr>
@@ -2341,7 +2341,7 @@
           <p:cNvPr id="11" name="">
             <a:extLst xmlns:a="http://schemas.openxmlformats.org/drawingml/2006/main">
               <a:ext uri="{FF2B5EF4-FFF2-40B4-BE49-F238E27FC236}">
-                <a16:creationId xmlns:a16="http://schemas.microsoft.com/office/drawing/2014/main" id="{5F99753A-022F-44C3-A2AC-267C4EAC2D7B}"/>
+                <a16:creationId xmlns:a16="http://schemas.microsoft.com/office/drawing/2014/main" id="{0CA93253-45FF-42B4-8F91-FE31F50D0D61}"/>
               </a:ext>
             </a:extLst>
           </p:cNvPr>
@@ -2396,7 +2396,7 @@
     </p:spTree>
     <p:extLst>
       <p:ext uri="{BB962C8B-B14F-4D97-AF65-F5344CB8AC3E}">
-        <p14:creationId xmlns:p14="http://schemas.microsoft.com/office/powerpoint/2010/main" val="1484466273"/>
+        <p14:creationId xmlns:p14="http://schemas.microsoft.com/office/powerpoint/2010/main" val="1334550024"/>
       </p:ext>
     </p:extLst>
   </p:cSld>
@@ -2427,7 +2427,7 @@
           <p:cNvPr id="14" name="">
             <a:extLst xmlns:a="http://schemas.openxmlformats.org/drawingml/2006/main">
               <a:ext uri="{FF2B5EF4-FFF2-40B4-BE49-F238E27FC236}">
-                <a16:creationId xmlns:a16="http://schemas.microsoft.com/office/drawing/2014/main" id="{DB12093A-6AC1-4FCA-8CA2-1E0A07B6C930}"/>
+                <a16:creationId xmlns:a16="http://schemas.microsoft.com/office/drawing/2014/main" id="{654BD97B-51CF-4E42-BF00-ED3C3A93CF67}"/>
               </a:ext>
             </a:extLst>
           </p:cNvPr>
@@ -2459,7 +2459,7 @@
           <p:cNvPr id="2" name="">
             <a:extLst xmlns:a="http://schemas.openxmlformats.org/drawingml/2006/main">
               <a:ext uri="{FF2B5EF4-FFF2-40B4-BE49-F238E27FC236}">
-                <a16:creationId xmlns:a16="http://schemas.microsoft.com/office/drawing/2014/main" id="{F7D8A0F5-0FE6-42F4-AF08-ED110EEA5B94}"/>
+                <a16:creationId xmlns:a16="http://schemas.microsoft.com/office/drawing/2014/main" id="{E1B6A4B7-995D-4094-AE78-58EBEB089A54}"/>
               </a:ext>
             </a:extLst>
           </p:cNvPr>
@@ -2516,7 +2516,7 @@
           <p:cNvPr id="3" name="">
             <a:extLst xmlns:a="http://schemas.openxmlformats.org/drawingml/2006/main">
               <a:ext uri="{FF2B5EF4-FFF2-40B4-BE49-F238E27FC236}">
-                <a16:creationId xmlns:a16="http://schemas.microsoft.com/office/drawing/2014/main" id="{8ECE8CD7-C630-4410-BEB2-1453E4CFE200}"/>
+                <a16:creationId xmlns:a16="http://schemas.microsoft.com/office/drawing/2014/main" id="{764FAE5A-B413-4A59-8AF3-14CA48B45A8D}"/>
               </a:ext>
             </a:extLst>
           </p:cNvPr>
@@ -2548,7 +2548,7 @@
           <p:cNvPr id="4" name="">
             <a:extLst xmlns:a="http://schemas.openxmlformats.org/drawingml/2006/main">
               <a:ext uri="{FF2B5EF4-FFF2-40B4-BE49-F238E27FC236}">
-                <a16:creationId xmlns:a16="http://schemas.microsoft.com/office/drawing/2014/main" id="{55677CA9-0BC9-4973-B3C4-1C5C04D3F86D}"/>
+                <a16:creationId xmlns:a16="http://schemas.microsoft.com/office/drawing/2014/main" id="{B283E1DA-8910-4FE1-98F8-6CB1A8946FF4}"/>
               </a:ext>
             </a:extLst>
           </p:cNvPr>
@@ -2605,7 +2605,7 @@
           <p:cNvPr id="5" name="">
             <a:extLst xmlns:a="http://schemas.openxmlformats.org/drawingml/2006/main">
               <a:ext uri="{FF2B5EF4-FFF2-40B4-BE49-F238E27FC236}">
-                <a16:creationId xmlns:a16="http://schemas.microsoft.com/office/drawing/2014/main" id="{526B2C5A-36FA-4FDD-91A9-92F51CA2E510}"/>
+                <a16:creationId xmlns:a16="http://schemas.microsoft.com/office/drawing/2014/main" id="{DA4CA0D8-670B-47D3-B1FE-B36111D57D92}"/>
               </a:ext>
             </a:extLst>
           </p:cNvPr>
@@ -2662,7 +2662,7 @@
           <p:cNvPr id="6" name="">
             <a:extLst xmlns:a="http://schemas.openxmlformats.org/drawingml/2006/main">
               <a:ext uri="{FF2B5EF4-FFF2-40B4-BE49-F238E27FC236}">
-                <a16:creationId xmlns:a16="http://schemas.microsoft.com/office/drawing/2014/main" id="{AEB2E588-863C-4071-A067-6B49728A1DD8}"/>
+                <a16:creationId xmlns:a16="http://schemas.microsoft.com/office/drawing/2014/main" id="{5B934ADD-1707-44A9-8794-06128B375375}"/>
               </a:ext>
             </a:extLst>
           </p:cNvPr>
@@ -2719,7 +2719,7 @@
           <p:cNvPr id="7" name="">
             <a:extLst xmlns:a="http://schemas.openxmlformats.org/drawingml/2006/main">
               <a:ext uri="{FF2B5EF4-FFF2-40B4-BE49-F238E27FC236}">
-                <a16:creationId xmlns:a16="http://schemas.microsoft.com/office/drawing/2014/main" id="{B1E175BC-A5A0-4B69-8267-5E091428F01F}"/>
+                <a16:creationId xmlns:a16="http://schemas.microsoft.com/office/drawing/2014/main" id="{8CD4C3E9-94A7-4BF3-994A-C0FFFB61F63C}"/>
               </a:ext>
             </a:extLst>
           </p:cNvPr>
@@ -2751,7 +2751,7 @@
           <p:cNvPr id="8" name="">
             <a:extLst xmlns:a="http://schemas.openxmlformats.org/drawingml/2006/main">
               <a:ext uri="{FF2B5EF4-FFF2-40B4-BE49-F238E27FC236}">
-                <a16:creationId xmlns:a16="http://schemas.microsoft.com/office/drawing/2014/main" id="{FCA97B80-1FC1-420D-9843-A79BA44F87BC}"/>
+                <a16:creationId xmlns:a16="http://schemas.microsoft.com/office/drawing/2014/main" id="{8DF6E41B-3613-454A-846E-8FA402774A1E}"/>
               </a:ext>
             </a:extLst>
           </p:cNvPr>
@@ -2808,7 +2808,7 @@
           <p:cNvPr id="9" name="">
             <a:extLst xmlns:a="http://schemas.openxmlformats.org/drawingml/2006/main">
               <a:ext uri="{FF2B5EF4-FFF2-40B4-BE49-F238E27FC236}">
-                <a16:creationId xmlns:a16="http://schemas.microsoft.com/office/drawing/2014/main" id="{04CB9EAE-DCC7-432C-8810-746BE5FFE143}"/>
+                <a16:creationId xmlns:a16="http://schemas.microsoft.com/office/drawing/2014/main" id="{28677A30-320D-4E39-AB66-5D55AE163BE8}"/>
               </a:ext>
             </a:extLst>
           </p:cNvPr>
@@ -2865,7 +2865,7 @@
           <p:cNvPr id="10" name="">
             <a:extLst xmlns:a="http://schemas.openxmlformats.org/drawingml/2006/main">
               <a:ext uri="{FF2B5EF4-FFF2-40B4-BE49-F238E27FC236}">
-                <a16:creationId xmlns:a16="http://schemas.microsoft.com/office/drawing/2014/main" id="{D72EF95D-0A0D-46EB-B896-39C8A6264B31}"/>
+                <a16:creationId xmlns:a16="http://schemas.microsoft.com/office/drawing/2014/main" id="{1EC65A82-0598-4EE8-A7D4-2F355002FE3E}"/>
               </a:ext>
             </a:extLst>
           </p:cNvPr>
@@ -2922,7 +2922,7 @@
           <p:cNvPr id="11" name="">
             <a:extLst xmlns:a="http://schemas.openxmlformats.org/drawingml/2006/main">
               <a:ext uri="{FF2B5EF4-FFF2-40B4-BE49-F238E27FC236}">
-                <a16:creationId xmlns:a16="http://schemas.microsoft.com/office/drawing/2014/main" id="{0AD9533B-45A5-4624-889C-DF8FA16713F8}"/>
+                <a16:creationId xmlns:a16="http://schemas.microsoft.com/office/drawing/2014/main" id="{05E86B51-FE77-4DCC-A1A3-B89BA6E5BB9F}"/>
               </a:ext>
             </a:extLst>
           </p:cNvPr>
@@ -2979,7 +2979,7 @@
           <p:cNvPr id="12" name="">
             <a:extLst xmlns:a="http://schemas.openxmlformats.org/drawingml/2006/main">
               <a:ext uri="{FF2B5EF4-FFF2-40B4-BE49-F238E27FC236}">
-                <a16:creationId xmlns:a16="http://schemas.microsoft.com/office/drawing/2014/main" id="{D3332C5C-68C0-46FA-B9F6-B24785AE6BC3}"/>
+                <a16:creationId xmlns:a16="http://schemas.microsoft.com/office/drawing/2014/main" id="{2BCC6B8F-0398-4D4D-8F4A-48B71BB81449}"/>
               </a:ext>
             </a:extLst>
           </p:cNvPr>
@@ -3036,7 +3036,7 @@
           <p:cNvPr id="13" name="">
             <a:extLst xmlns:a="http://schemas.openxmlformats.org/drawingml/2006/main">
               <a:ext uri="{FF2B5EF4-FFF2-40B4-BE49-F238E27FC236}">
-                <a16:creationId xmlns:a16="http://schemas.microsoft.com/office/drawing/2014/main" id="{2B6F7A5A-3A45-4F9A-9DE2-6BD63F4F34B1}"/>
+                <a16:creationId xmlns:a16="http://schemas.microsoft.com/office/drawing/2014/main" id="{CE99EEF9-DB92-48B6-8A36-09F861F9DA30}"/>
               </a:ext>
             </a:extLst>
           </p:cNvPr>
@@ -3083,7 +3083,7 @@
                 <a:ea typeface="Arial"/>
                 <a:cs typeface="Arial"/>
               </a:rPr>
-              <a:t>Teacher check: 244.8. The explanation must show why the method works.</a:t>
+              <a:t>Teacher check: 220.8. The explanation must show why the method works.</a:t>
             </a:r>
           </a:p>
         </p:txBody>
@@ -3091,7 +3091,7 @@
     </p:spTree>
     <p:extLst>
       <p:ext uri="{BB962C8B-B14F-4D97-AF65-F5344CB8AC3E}">
-        <p14:creationId xmlns:p14="http://schemas.microsoft.com/office/powerpoint/2010/main" val="520916928"/>
+        <p14:creationId xmlns:p14="http://schemas.microsoft.com/office/powerpoint/2010/main" val="1652827895"/>
       </p:ext>
     </p:extLst>
   </p:cSld>
@@ -3292,7 +3292,7 @@
           <p:cNvPr id="19" name="">
             <a:extLst xmlns:a="http://schemas.openxmlformats.org/drawingml/2006/main">
               <a:ext uri="{FF2B5EF4-FFF2-40B4-BE49-F238E27FC236}">
-                <a16:creationId xmlns:a16="http://schemas.microsoft.com/office/drawing/2014/main" id="{A67021B2-279E-4E3D-B0F4-942B381914E3}"/>
+                <a16:creationId xmlns:a16="http://schemas.microsoft.com/office/drawing/2014/main" id="{EF1AA3ED-E360-45CA-97B4-687935F932B3}"/>
               </a:ext>
             </a:extLst>
           </p:cNvPr>
@@ -3324,7 +3324,7 @@
           <p:cNvPr id="2" name="">
             <a:extLst xmlns:a="http://schemas.openxmlformats.org/drawingml/2006/main">
               <a:ext uri="{FF2B5EF4-FFF2-40B4-BE49-F238E27FC236}">
-                <a16:creationId xmlns:a16="http://schemas.microsoft.com/office/drawing/2014/main" id="{65238617-5034-4456-9082-E00DCFDF0DDA}"/>
+                <a16:creationId xmlns:a16="http://schemas.microsoft.com/office/drawing/2014/main" id="{DF192014-A69F-4EFF-93AF-959B2041078F}"/>
               </a:ext>
             </a:extLst>
           </p:cNvPr>
@@ -3381,7 +3381,7 @@
           <p:cNvPr id="3" name="">
             <a:extLst xmlns:a="http://schemas.openxmlformats.org/drawingml/2006/main">
               <a:ext uri="{FF2B5EF4-FFF2-40B4-BE49-F238E27FC236}">
-                <a16:creationId xmlns:a16="http://schemas.microsoft.com/office/drawing/2014/main" id="{0C2A6D73-BE79-496C-981E-37CA993A8EE1}"/>
+                <a16:creationId xmlns:a16="http://schemas.microsoft.com/office/drawing/2014/main" id="{3C8A4FEB-5D5A-4ED6-8808-46EF89EF0645}"/>
               </a:ext>
             </a:extLst>
           </p:cNvPr>
@@ -3413,7 +3413,7 @@
           <p:cNvPr id="4" name="">
             <a:extLst xmlns:a="http://schemas.openxmlformats.org/drawingml/2006/main">
               <a:ext uri="{FF2B5EF4-FFF2-40B4-BE49-F238E27FC236}">
-                <a16:creationId xmlns:a16="http://schemas.microsoft.com/office/drawing/2014/main" id="{207009A1-5EDD-4C55-9AB5-B39C940668B5}"/>
+                <a16:creationId xmlns:a16="http://schemas.microsoft.com/office/drawing/2014/main" id="{6AE3DCAF-7CA2-465D-9D71-6A59CE56DA40}"/>
               </a:ext>
             </a:extLst>
           </p:cNvPr>
@@ -3470,7 +3470,7 @@
           <p:cNvPr id="5" name="">
             <a:extLst xmlns:a="http://schemas.openxmlformats.org/drawingml/2006/main">
               <a:ext uri="{FF2B5EF4-FFF2-40B4-BE49-F238E27FC236}">
-                <a16:creationId xmlns:a16="http://schemas.microsoft.com/office/drawing/2014/main" id="{B1267FFD-B256-487E-9227-0E4BB6B2874A}"/>
+                <a16:creationId xmlns:a16="http://schemas.microsoft.com/office/drawing/2014/main" id="{333A379E-19B5-4BCA-B8AF-8147EF5E7CF3}"/>
               </a:ext>
             </a:extLst>
           </p:cNvPr>
@@ -3527,7 +3527,7 @@
           <p:cNvPr id="6" name="">
             <a:extLst xmlns:a="http://schemas.openxmlformats.org/drawingml/2006/main">
               <a:ext uri="{FF2B5EF4-FFF2-40B4-BE49-F238E27FC236}">
-                <a16:creationId xmlns:a16="http://schemas.microsoft.com/office/drawing/2014/main" id="{34EB9DA2-B84E-4F4B-BD51-35CA6ED281C8}"/>
+                <a16:creationId xmlns:a16="http://schemas.microsoft.com/office/drawing/2014/main" id="{20452DAF-3430-4AED-9A01-333A6F66516B}"/>
               </a:ext>
             </a:extLst>
           </p:cNvPr>
@@ -3584,7 +3584,7 @@
           <p:cNvPr id="7" name="">
             <a:extLst xmlns:a="http://schemas.openxmlformats.org/drawingml/2006/main">
               <a:ext uri="{FF2B5EF4-FFF2-40B4-BE49-F238E27FC236}">
-                <a16:creationId xmlns:a16="http://schemas.microsoft.com/office/drawing/2014/main" id="{C95440F2-C47C-48FE-8A51-38458C0DDE2B}"/>
+                <a16:creationId xmlns:a16="http://schemas.microsoft.com/office/drawing/2014/main" id="{C173E7B7-5D63-42D8-970A-6C0F3F06C9AD}"/>
               </a:ext>
             </a:extLst>
           </p:cNvPr>
@@ -3616,7 +3616,7 @@
           <p:cNvPr id="8" name="">
             <a:extLst xmlns:a="http://schemas.openxmlformats.org/drawingml/2006/main">
               <a:ext uri="{FF2B5EF4-FFF2-40B4-BE49-F238E27FC236}">
-                <a16:creationId xmlns:a16="http://schemas.microsoft.com/office/drawing/2014/main" id="{6A337E94-BAC8-4BF0-A747-330E56FBE238}"/>
+                <a16:creationId xmlns:a16="http://schemas.microsoft.com/office/drawing/2014/main" id="{CBBA6E7F-58DC-49F8-8598-83A3F6B28830}"/>
               </a:ext>
             </a:extLst>
           </p:cNvPr>
@@ -3673,7 +3673,7 @@
           <p:cNvPr id="9" name="">
             <a:extLst xmlns:a="http://schemas.openxmlformats.org/drawingml/2006/main">
               <a:ext uri="{FF2B5EF4-FFF2-40B4-BE49-F238E27FC236}">
-                <a16:creationId xmlns:a16="http://schemas.microsoft.com/office/drawing/2014/main" id="{7CB107B2-1120-41F0-ABB1-DE75A1695927}"/>
+                <a16:creationId xmlns:a16="http://schemas.microsoft.com/office/drawing/2014/main" id="{224D4266-2660-4523-9810-3B98AE3B4215}"/>
               </a:ext>
             </a:extLst>
           </p:cNvPr>
@@ -3730,7 +3730,7 @@
           <p:cNvPr id="10" name="">
             <a:extLst xmlns:a="http://schemas.openxmlformats.org/drawingml/2006/main">
               <a:ext uri="{FF2B5EF4-FFF2-40B4-BE49-F238E27FC236}">
-                <a16:creationId xmlns:a16="http://schemas.microsoft.com/office/drawing/2014/main" id="{BB83E0ED-9C25-4773-AE5C-1DA60DC5633E}"/>
+                <a16:creationId xmlns:a16="http://schemas.microsoft.com/office/drawing/2014/main" id="{5417001F-773A-4101-9C02-52EFA5E393A2}"/>
               </a:ext>
             </a:extLst>
           </p:cNvPr>
@@ -3787,7 +3787,7 @@
           <p:cNvPr id="11" name="">
             <a:extLst xmlns:a="http://schemas.openxmlformats.org/drawingml/2006/main">
               <a:ext uri="{FF2B5EF4-FFF2-40B4-BE49-F238E27FC236}">
-                <a16:creationId xmlns:a16="http://schemas.microsoft.com/office/drawing/2014/main" id="{41EF788F-BA0F-4D13-B639-196CBA60E2E4}"/>
+                <a16:creationId xmlns:a16="http://schemas.microsoft.com/office/drawing/2014/main" id="{60220F8F-CFAD-4F9E-9452-3EFB658EFFF2}"/>
               </a:ext>
             </a:extLst>
           </p:cNvPr>
@@ -3821,7 +3821,7 @@
           <p:cNvPr id="12" name="">
             <a:extLst xmlns:a="http://schemas.openxmlformats.org/drawingml/2006/main">
               <a:ext uri="{FF2B5EF4-FFF2-40B4-BE49-F238E27FC236}">
-                <a16:creationId xmlns:a16="http://schemas.microsoft.com/office/drawing/2014/main" id="{99F88FB7-BFF0-4A96-81E8-F771B2FC4979}"/>
+                <a16:creationId xmlns:a16="http://schemas.microsoft.com/office/drawing/2014/main" id="{2E9BCB2D-4661-4B3C-8535-B0DBB1B8B0C7}"/>
               </a:ext>
             </a:extLst>
           </p:cNvPr>
@@ -3878,7 +3878,7 @@
           <p:cNvPr id="13" name="">
             <a:extLst xmlns:a="http://schemas.openxmlformats.org/drawingml/2006/main">
               <a:ext uri="{FF2B5EF4-FFF2-40B4-BE49-F238E27FC236}">
-                <a16:creationId xmlns:a16="http://schemas.microsoft.com/office/drawing/2014/main" id="{BD78C346-872D-4CB3-A203-AE6804006739}"/>
+                <a16:creationId xmlns:a16="http://schemas.microsoft.com/office/drawing/2014/main" id="{074A4C7F-BDB9-4978-9900-310E56D8C221}"/>
               </a:ext>
             </a:extLst>
           </p:cNvPr>
@@ -3935,7 +3935,7 @@
           <p:cNvPr id="14" name="">
             <a:extLst xmlns:a="http://schemas.openxmlformats.org/drawingml/2006/main">
               <a:ext uri="{FF2B5EF4-FFF2-40B4-BE49-F238E27FC236}">
-                <a16:creationId xmlns:a16="http://schemas.microsoft.com/office/drawing/2014/main" id="{BF230FCC-133B-424A-BDC6-5A71EC9D7C8D}"/>
+                <a16:creationId xmlns:a16="http://schemas.microsoft.com/office/drawing/2014/main" id="{E9E415B2-1E92-4D09-BBEA-74B1D9FF82F7}"/>
               </a:ext>
             </a:extLst>
           </p:cNvPr>
@@ -3992,7 +3992,7 @@
           <p:cNvPr id="15" name="">
             <a:extLst xmlns:a="http://schemas.openxmlformats.org/drawingml/2006/main">
               <a:ext uri="{FF2B5EF4-FFF2-40B4-BE49-F238E27FC236}">
-                <a16:creationId xmlns:a16="http://schemas.microsoft.com/office/drawing/2014/main" id="{C337BFAB-1D90-4193-8794-90339DFAE987}"/>
+                <a16:creationId xmlns:a16="http://schemas.microsoft.com/office/drawing/2014/main" id="{8101EBDE-3372-487E-832E-4F3A8B383650}"/>
               </a:ext>
             </a:extLst>
           </p:cNvPr>
@@ -4026,7 +4026,7 @@
           <p:cNvPr id="16" name="">
             <a:extLst xmlns:a="http://schemas.openxmlformats.org/drawingml/2006/main">
               <a:ext uri="{FF2B5EF4-FFF2-40B4-BE49-F238E27FC236}">
-                <a16:creationId xmlns:a16="http://schemas.microsoft.com/office/drawing/2014/main" id="{E52E1DDE-4D3B-446B-BF54-A13AECBC8D1B}"/>
+                <a16:creationId xmlns:a16="http://schemas.microsoft.com/office/drawing/2014/main" id="{6E1084CF-6895-41F4-84A9-B70C50ED7BC0}"/>
               </a:ext>
             </a:extLst>
           </p:cNvPr>
@@ -4083,7 +4083,7 @@
           <p:cNvPr id="17" name="">
             <a:extLst xmlns:a="http://schemas.openxmlformats.org/drawingml/2006/main">
               <a:ext uri="{FF2B5EF4-FFF2-40B4-BE49-F238E27FC236}">
-                <a16:creationId xmlns:a16="http://schemas.microsoft.com/office/drawing/2014/main" id="{A947BFBE-344A-47F0-A3B3-D7D5CC50ABB7}"/>
+                <a16:creationId xmlns:a16="http://schemas.microsoft.com/office/drawing/2014/main" id="{9F908BF0-B227-499A-8995-9EBEE5270D07}"/>
               </a:ext>
             </a:extLst>
           </p:cNvPr>
@@ -4140,7 +4140,7 @@
           <p:cNvPr id="18" name="">
             <a:extLst xmlns:a="http://schemas.openxmlformats.org/drawingml/2006/main">
               <a:ext uri="{FF2B5EF4-FFF2-40B4-BE49-F238E27FC236}">
-                <a16:creationId xmlns:a16="http://schemas.microsoft.com/office/drawing/2014/main" id="{BB7BB975-E8B0-45B9-BBB2-CB748EDC99D7}"/>
+                <a16:creationId xmlns:a16="http://schemas.microsoft.com/office/drawing/2014/main" id="{BF2FE9C4-EFF9-42DC-BEBB-D0E60587C500}"/>
               </a:ext>
             </a:extLst>
           </p:cNvPr>
@@ -4195,7 +4195,7 @@
     </p:spTree>
     <p:extLst>
       <p:ext uri="{BB962C8B-B14F-4D97-AF65-F5344CB8AC3E}">
-        <p14:creationId xmlns:p14="http://schemas.microsoft.com/office/powerpoint/2010/main" val="2117467686"/>
+        <p14:creationId xmlns:p14="http://schemas.microsoft.com/office/powerpoint/2010/main" val="152252904"/>
       </p:ext>
     </p:extLst>
   </p:cSld>
@@ -4350,7 +4350,7 @@
           <p:cNvPr id="23" name="">
             <a:extLst xmlns:a="http://schemas.openxmlformats.org/drawingml/2006/main">
               <a:ext uri="{FF2B5EF4-FFF2-40B4-BE49-F238E27FC236}">
-                <a16:creationId xmlns:a16="http://schemas.microsoft.com/office/drawing/2014/main" id="{4504F7EA-41F2-4028-9290-30EB93B5FF24}"/>
+                <a16:creationId xmlns:a16="http://schemas.microsoft.com/office/drawing/2014/main" id="{ED58EFBD-A7A6-41C4-A814-0AA2688845B5}"/>
               </a:ext>
             </a:extLst>
           </p:cNvPr>
@@ -4382,7 +4382,7 @@
           <p:cNvPr id="2" name="">
             <a:extLst xmlns:a="http://schemas.openxmlformats.org/drawingml/2006/main">
               <a:ext uri="{FF2B5EF4-FFF2-40B4-BE49-F238E27FC236}">
-                <a16:creationId xmlns:a16="http://schemas.microsoft.com/office/drawing/2014/main" id="{1EAF6C2E-7E5F-4BA6-9CD4-E357FC2892EC}"/>
+                <a16:creationId xmlns:a16="http://schemas.microsoft.com/office/drawing/2014/main" id="{372BCD8F-196C-4221-A117-ED921F1379E8}"/>
               </a:ext>
             </a:extLst>
           </p:cNvPr>
@@ -4439,7 +4439,7 @@
           <p:cNvPr id="3" name="">
             <a:extLst xmlns:a="http://schemas.openxmlformats.org/drawingml/2006/main">
               <a:ext uri="{FF2B5EF4-FFF2-40B4-BE49-F238E27FC236}">
-                <a16:creationId xmlns:a16="http://schemas.microsoft.com/office/drawing/2014/main" id="{BCB79358-FE42-467E-A0AD-237B835FE933}"/>
+                <a16:creationId xmlns:a16="http://schemas.microsoft.com/office/drawing/2014/main" id="{DE94085F-4449-4BD7-A0C0-559EBE17487C}"/>
               </a:ext>
             </a:extLst>
           </p:cNvPr>
@@ -4471,7 +4471,7 @@
           <p:cNvPr id="4" name="">
             <a:extLst xmlns:a="http://schemas.openxmlformats.org/drawingml/2006/main">
               <a:ext uri="{FF2B5EF4-FFF2-40B4-BE49-F238E27FC236}">
-                <a16:creationId xmlns:a16="http://schemas.microsoft.com/office/drawing/2014/main" id="{368DDEA0-6280-4C9C-8DC9-1475307C46FC}"/>
+                <a16:creationId xmlns:a16="http://schemas.microsoft.com/office/drawing/2014/main" id="{7B584A54-1D04-4CC6-8271-2D532F6F3B08}"/>
               </a:ext>
             </a:extLst>
           </p:cNvPr>
@@ -4528,7 +4528,7 @@
           <p:cNvPr id="5" name="">
             <a:extLst xmlns:a="http://schemas.openxmlformats.org/drawingml/2006/main">
               <a:ext uri="{FF2B5EF4-FFF2-40B4-BE49-F238E27FC236}">
-                <a16:creationId xmlns:a16="http://schemas.microsoft.com/office/drawing/2014/main" id="{EB0FB865-5D4B-44EB-951C-95585C718EF3}"/>
+                <a16:creationId xmlns:a16="http://schemas.microsoft.com/office/drawing/2014/main" id="{906F5D88-0D9B-49B6-AAFA-D4E68DD1BA84}"/>
               </a:ext>
             </a:extLst>
           </p:cNvPr>
@@ -4585,7 +4585,7 @@
           <p:cNvPr id="6" name="">
             <a:extLst xmlns:a="http://schemas.openxmlformats.org/drawingml/2006/main">
               <a:ext uri="{FF2B5EF4-FFF2-40B4-BE49-F238E27FC236}">
-                <a16:creationId xmlns:a16="http://schemas.microsoft.com/office/drawing/2014/main" id="{2B374B2D-D362-408E-BABB-4A8F47378743}"/>
+                <a16:creationId xmlns:a16="http://schemas.microsoft.com/office/drawing/2014/main" id="{6BC8F138-4D5D-43F4-9D7F-DA4359E0B068}"/>
               </a:ext>
             </a:extLst>
           </p:cNvPr>
@@ -4642,7 +4642,7 @@
           <p:cNvPr id="7" name="">
             <a:extLst xmlns:a="http://schemas.openxmlformats.org/drawingml/2006/main">
               <a:ext uri="{FF2B5EF4-FFF2-40B4-BE49-F238E27FC236}">
-                <a16:creationId xmlns:a16="http://schemas.microsoft.com/office/drawing/2014/main" id="{6BF88D19-FE0F-4030-9B6B-80F79C4BF14F}"/>
+                <a16:creationId xmlns:a16="http://schemas.microsoft.com/office/drawing/2014/main" id="{EF57452E-84CD-4430-8984-6B733BD3C2C9}"/>
               </a:ext>
             </a:extLst>
           </p:cNvPr>
@@ -4674,7 +4674,7 @@
           <p:cNvPr id="8" name="">
             <a:extLst xmlns:a="http://schemas.openxmlformats.org/drawingml/2006/main">
               <a:ext uri="{FF2B5EF4-FFF2-40B4-BE49-F238E27FC236}">
-                <a16:creationId xmlns:a16="http://schemas.microsoft.com/office/drawing/2014/main" id="{1E092C25-A0A6-4D33-8391-D5B081D67CD9}"/>
+                <a16:creationId xmlns:a16="http://schemas.microsoft.com/office/drawing/2014/main" id="{5BBAD959-355E-4102-847D-8603BE420553}"/>
               </a:ext>
             </a:extLst>
           </p:cNvPr>
@@ -4731,7 +4731,7 @@
           <p:cNvPr id="9" name="">
             <a:extLst xmlns:a="http://schemas.openxmlformats.org/drawingml/2006/main">
               <a:ext uri="{FF2B5EF4-FFF2-40B4-BE49-F238E27FC236}">
-                <a16:creationId xmlns:a16="http://schemas.microsoft.com/office/drawing/2014/main" id="{C7677B47-58A7-4B38-992C-5364D8348275}"/>
+                <a16:creationId xmlns:a16="http://schemas.microsoft.com/office/drawing/2014/main" id="{714947D6-C58E-46AA-A513-35EE464A160A}"/>
               </a:ext>
             </a:extLst>
           </p:cNvPr>
@@ -4788,7 +4788,7 @@
           <p:cNvPr id="10" name="">
             <a:extLst xmlns:a="http://schemas.openxmlformats.org/drawingml/2006/main">
               <a:ext uri="{FF2B5EF4-FFF2-40B4-BE49-F238E27FC236}">
-                <a16:creationId xmlns:a16="http://schemas.microsoft.com/office/drawing/2014/main" id="{EB18069E-B588-4556-9D10-A94BD8970F71}"/>
+                <a16:creationId xmlns:a16="http://schemas.microsoft.com/office/drawing/2014/main" id="{6A328441-4024-476B-9316-1F67D8CAA29D}"/>
               </a:ext>
             </a:extLst>
           </p:cNvPr>
@@ -4822,7 +4822,7 @@
           <p:cNvPr id="11" name="">
             <a:extLst xmlns:a="http://schemas.openxmlformats.org/drawingml/2006/main">
               <a:ext uri="{FF2B5EF4-FFF2-40B4-BE49-F238E27FC236}">
-                <a16:creationId xmlns:a16="http://schemas.microsoft.com/office/drawing/2014/main" id="{52F3A141-A8E7-4A6E-A55A-B573369FE7FD}"/>
+                <a16:creationId xmlns:a16="http://schemas.microsoft.com/office/drawing/2014/main" id="{E1D0D977-1B23-45F8-B227-EEAEB20FE190}"/>
               </a:ext>
             </a:extLst>
           </p:cNvPr>
@@ -4854,7 +4854,7 @@
           <p:cNvPr id="12" name="">
             <a:extLst xmlns:a="http://schemas.openxmlformats.org/drawingml/2006/main">
               <a:ext uri="{FF2B5EF4-FFF2-40B4-BE49-F238E27FC236}">
-                <a16:creationId xmlns:a16="http://schemas.microsoft.com/office/drawing/2014/main" id="{35B70DE6-2DEB-4561-BDED-F94EAB079C1D}"/>
+                <a16:creationId xmlns:a16="http://schemas.microsoft.com/office/drawing/2014/main" id="{B81C33E5-9813-46C5-86DF-2682BA93FD9B}"/>
               </a:ext>
             </a:extLst>
           </p:cNvPr>
@@ -4911,7 +4911,7 @@
           <p:cNvPr id="13" name="">
             <a:extLst xmlns:a="http://schemas.openxmlformats.org/drawingml/2006/main">
               <a:ext uri="{FF2B5EF4-FFF2-40B4-BE49-F238E27FC236}">
-                <a16:creationId xmlns:a16="http://schemas.microsoft.com/office/drawing/2014/main" id="{E23967D0-5A7E-478B-9424-CDBB2360CB2F}"/>
+                <a16:creationId xmlns:a16="http://schemas.microsoft.com/office/drawing/2014/main" id="{A6E30551-D75D-4172-95A8-45DD9195EEEF}"/>
               </a:ext>
             </a:extLst>
           </p:cNvPr>
@@ -4968,7 +4968,7 @@
           <p:cNvPr id="14" name="">
             <a:extLst xmlns:a="http://schemas.openxmlformats.org/drawingml/2006/main">
               <a:ext uri="{FF2B5EF4-FFF2-40B4-BE49-F238E27FC236}">
-                <a16:creationId xmlns:a16="http://schemas.microsoft.com/office/drawing/2014/main" id="{689D8B56-0A45-4D71-B771-2AC5FB8E06E4}"/>
+                <a16:creationId xmlns:a16="http://schemas.microsoft.com/office/drawing/2014/main" id="{796B8AF9-73E8-473F-AD42-9C21B99895A0}"/>
               </a:ext>
             </a:extLst>
           </p:cNvPr>
@@ -5002,7 +5002,7 @@
           <p:cNvPr id="15" name="">
             <a:extLst xmlns:a="http://schemas.openxmlformats.org/drawingml/2006/main">
               <a:ext uri="{FF2B5EF4-FFF2-40B4-BE49-F238E27FC236}">
-                <a16:creationId xmlns:a16="http://schemas.microsoft.com/office/drawing/2014/main" id="{18807639-2A08-4950-A72C-D948550AB5D3}"/>
+                <a16:creationId xmlns:a16="http://schemas.microsoft.com/office/drawing/2014/main" id="{24B15237-6E63-4B8A-8654-8EBCF16E84BD}"/>
               </a:ext>
             </a:extLst>
           </p:cNvPr>
@@ -5034,7 +5034,7 @@
           <p:cNvPr id="16" name="">
             <a:extLst xmlns:a="http://schemas.openxmlformats.org/drawingml/2006/main">
               <a:ext uri="{FF2B5EF4-FFF2-40B4-BE49-F238E27FC236}">
-                <a16:creationId xmlns:a16="http://schemas.microsoft.com/office/drawing/2014/main" id="{1CB4AA93-0D9D-4B8B-AD7A-07E34121132B}"/>
+                <a16:creationId xmlns:a16="http://schemas.microsoft.com/office/drawing/2014/main" id="{28256E42-87AA-4B52-951D-34557B12E7AB}"/>
               </a:ext>
             </a:extLst>
           </p:cNvPr>
@@ -5091,7 +5091,7 @@
           <p:cNvPr id="17" name="">
             <a:extLst xmlns:a="http://schemas.openxmlformats.org/drawingml/2006/main">
               <a:ext uri="{FF2B5EF4-FFF2-40B4-BE49-F238E27FC236}">
-                <a16:creationId xmlns:a16="http://schemas.microsoft.com/office/drawing/2014/main" id="{E13C2CC1-3912-4526-9E7E-5319885BE39D}"/>
+                <a16:creationId xmlns:a16="http://schemas.microsoft.com/office/drawing/2014/main" id="{3B1D0276-1514-494C-B793-A82BA688FF8F}"/>
               </a:ext>
             </a:extLst>
           </p:cNvPr>
@@ -5148,7 +5148,7 @@
           <p:cNvPr id="18" name="">
             <a:extLst xmlns:a="http://schemas.openxmlformats.org/drawingml/2006/main">
               <a:ext uri="{FF2B5EF4-FFF2-40B4-BE49-F238E27FC236}">
-                <a16:creationId xmlns:a16="http://schemas.microsoft.com/office/drawing/2014/main" id="{EA579557-76AA-445C-B843-886B669A2FAD}"/>
+                <a16:creationId xmlns:a16="http://schemas.microsoft.com/office/drawing/2014/main" id="{CC62DA49-154E-4D07-A7DB-3E13D2033040}"/>
               </a:ext>
             </a:extLst>
           </p:cNvPr>
@@ -5182,7 +5182,7 @@
           <p:cNvPr id="19" name="">
             <a:extLst xmlns:a="http://schemas.openxmlformats.org/drawingml/2006/main">
               <a:ext uri="{FF2B5EF4-FFF2-40B4-BE49-F238E27FC236}">
-                <a16:creationId xmlns:a16="http://schemas.microsoft.com/office/drawing/2014/main" id="{B38FB186-F14D-46AD-A846-8207D3E68286}"/>
+                <a16:creationId xmlns:a16="http://schemas.microsoft.com/office/drawing/2014/main" id="{FDC15B2C-D834-4911-B160-71DFFDB50B06}"/>
               </a:ext>
             </a:extLst>
           </p:cNvPr>
@@ -5214,7 +5214,7 @@
           <p:cNvPr id="20" name="">
             <a:extLst xmlns:a="http://schemas.openxmlformats.org/drawingml/2006/main">
               <a:ext uri="{FF2B5EF4-FFF2-40B4-BE49-F238E27FC236}">
-                <a16:creationId xmlns:a16="http://schemas.microsoft.com/office/drawing/2014/main" id="{88B5D405-2581-4147-AC96-B03DBFD8D9DF}"/>
+                <a16:creationId xmlns:a16="http://schemas.microsoft.com/office/drawing/2014/main" id="{5715645A-47BC-496D-A89C-6D2E0ABCC000}"/>
               </a:ext>
             </a:extLst>
           </p:cNvPr>
@@ -5271,7 +5271,7 @@
           <p:cNvPr id="21" name="">
             <a:extLst xmlns:a="http://schemas.openxmlformats.org/drawingml/2006/main">
               <a:ext uri="{FF2B5EF4-FFF2-40B4-BE49-F238E27FC236}">
-                <a16:creationId xmlns:a16="http://schemas.microsoft.com/office/drawing/2014/main" id="{C162EE54-DA69-458D-990D-799FAC61B8C2}"/>
+                <a16:creationId xmlns:a16="http://schemas.microsoft.com/office/drawing/2014/main" id="{A2BFD0D9-7E1E-415B-9E82-CD9B9FD7CD50}"/>
               </a:ext>
             </a:extLst>
           </p:cNvPr>
@@ -5328,7 +5328,7 @@
           <p:cNvPr id="22" name="">
             <a:extLst xmlns:a="http://schemas.openxmlformats.org/drawingml/2006/main">
               <a:ext uri="{FF2B5EF4-FFF2-40B4-BE49-F238E27FC236}">
-                <a16:creationId xmlns:a16="http://schemas.microsoft.com/office/drawing/2014/main" id="{06C9FB9B-A44C-4F12-AC86-FBDEC382301D}"/>
+                <a16:creationId xmlns:a16="http://schemas.microsoft.com/office/drawing/2014/main" id="{57135604-4F42-42FC-A578-6075EE5BCC62}"/>
               </a:ext>
             </a:extLst>
           </p:cNvPr>
@@ -5383,7 +5383,7 @@
     </p:spTree>
     <p:extLst>
       <p:ext uri="{BB962C8B-B14F-4D97-AF65-F5344CB8AC3E}">
-        <p14:creationId xmlns:p14="http://schemas.microsoft.com/office/powerpoint/2010/main" val="632302728"/>
+        <p14:creationId xmlns:p14="http://schemas.microsoft.com/office/powerpoint/2010/main" val="995914145"/>
       </p:ext>
     </p:extLst>
   </p:cSld>
@@ -5584,7 +5584,7 @@
           <p:cNvPr id="23" name="">
             <a:extLst xmlns:a="http://schemas.openxmlformats.org/drawingml/2006/main">
               <a:ext uri="{FF2B5EF4-FFF2-40B4-BE49-F238E27FC236}">
-                <a16:creationId xmlns:a16="http://schemas.microsoft.com/office/drawing/2014/main" id="{80362761-6B20-48F1-A9CF-4C52242073EF}"/>
+                <a16:creationId xmlns:a16="http://schemas.microsoft.com/office/drawing/2014/main" id="{BFC7E4F0-0649-4858-8DDC-89CE8A12E98A}"/>
               </a:ext>
             </a:extLst>
           </p:cNvPr>
@@ -5616,7 +5616,7 @@
           <p:cNvPr id="2" name="">
             <a:extLst xmlns:a="http://schemas.openxmlformats.org/drawingml/2006/main">
               <a:ext uri="{FF2B5EF4-FFF2-40B4-BE49-F238E27FC236}">
-                <a16:creationId xmlns:a16="http://schemas.microsoft.com/office/drawing/2014/main" id="{F62F8C95-379C-422E-BF6E-87425C614426}"/>
+                <a16:creationId xmlns:a16="http://schemas.microsoft.com/office/drawing/2014/main" id="{0225F3F3-2166-499F-8E0E-4F5209423574}"/>
               </a:ext>
             </a:extLst>
           </p:cNvPr>
@@ -5673,7 +5673,7 @@
           <p:cNvPr id="3" name="">
             <a:extLst xmlns:a="http://schemas.openxmlformats.org/drawingml/2006/main">
               <a:ext uri="{FF2B5EF4-FFF2-40B4-BE49-F238E27FC236}">
-                <a16:creationId xmlns:a16="http://schemas.microsoft.com/office/drawing/2014/main" id="{ACBBA303-689A-406D-B4CB-8D4D1903F26A}"/>
+                <a16:creationId xmlns:a16="http://schemas.microsoft.com/office/drawing/2014/main" id="{C08E6FFB-A747-4EFB-BB27-8A4C3B6A54F7}"/>
               </a:ext>
             </a:extLst>
           </p:cNvPr>
@@ -5705,7 +5705,7 @@
           <p:cNvPr id="4" name="">
             <a:extLst xmlns:a="http://schemas.openxmlformats.org/drawingml/2006/main">
               <a:ext uri="{FF2B5EF4-FFF2-40B4-BE49-F238E27FC236}">
-                <a16:creationId xmlns:a16="http://schemas.microsoft.com/office/drawing/2014/main" id="{3B440EA5-A2AB-4798-8E62-96BBA87F7D33}"/>
+                <a16:creationId xmlns:a16="http://schemas.microsoft.com/office/drawing/2014/main" id="{B8C81DE4-1F36-45BA-A46F-BE971D05EF35}"/>
               </a:ext>
             </a:extLst>
           </p:cNvPr>
@@ -5762,7 +5762,7 @@
           <p:cNvPr id="5" name="">
             <a:extLst xmlns:a="http://schemas.openxmlformats.org/drawingml/2006/main">
               <a:ext uri="{FF2B5EF4-FFF2-40B4-BE49-F238E27FC236}">
-                <a16:creationId xmlns:a16="http://schemas.microsoft.com/office/drawing/2014/main" id="{B1795E09-F77E-4270-A291-7A464784AFAF}"/>
+                <a16:creationId xmlns:a16="http://schemas.microsoft.com/office/drawing/2014/main" id="{32D97868-44B8-4BFC-9FB8-26F5416A2F07}"/>
               </a:ext>
             </a:extLst>
           </p:cNvPr>
@@ -5819,7 +5819,7 @@
           <p:cNvPr id="6" name="">
             <a:extLst xmlns:a="http://schemas.openxmlformats.org/drawingml/2006/main">
               <a:ext uri="{FF2B5EF4-FFF2-40B4-BE49-F238E27FC236}">
-                <a16:creationId xmlns:a16="http://schemas.microsoft.com/office/drawing/2014/main" id="{233126F0-A6FE-414A-BFE3-6398F2EAE4AC}"/>
+                <a16:creationId xmlns:a16="http://schemas.microsoft.com/office/drawing/2014/main" id="{AB73EF07-9D9B-4DE2-A8E5-3365B91589F3}"/>
               </a:ext>
             </a:extLst>
           </p:cNvPr>
@@ -5876,7 +5876,7 @@
           <p:cNvPr id="7" name="">
             <a:extLst xmlns:a="http://schemas.openxmlformats.org/drawingml/2006/main">
               <a:ext uri="{FF2B5EF4-FFF2-40B4-BE49-F238E27FC236}">
-                <a16:creationId xmlns:a16="http://schemas.microsoft.com/office/drawing/2014/main" id="{93298BE7-7862-44D5-B36D-569971F62EC1}"/>
+                <a16:creationId xmlns:a16="http://schemas.microsoft.com/office/drawing/2014/main" id="{34E60583-1B45-421A-96C8-3B68BC61B86C}"/>
               </a:ext>
             </a:extLst>
           </p:cNvPr>
@@ -5908,7 +5908,7 @@
           <p:cNvPr id="8" name="">
             <a:extLst xmlns:a="http://schemas.openxmlformats.org/drawingml/2006/main">
               <a:ext uri="{FF2B5EF4-FFF2-40B4-BE49-F238E27FC236}">
-                <a16:creationId xmlns:a16="http://schemas.microsoft.com/office/drawing/2014/main" id="{8D8CA78A-00C2-4313-A063-8A842D38BE5B}"/>
+                <a16:creationId xmlns:a16="http://schemas.microsoft.com/office/drawing/2014/main" id="{E2360DFE-D6E4-4FA6-ABE9-816A2A25FFCA}"/>
               </a:ext>
             </a:extLst>
           </p:cNvPr>
@@ -5965,7 +5965,7 @@
           <p:cNvPr id="9" name="">
             <a:extLst xmlns:a="http://schemas.openxmlformats.org/drawingml/2006/main">
               <a:ext uri="{FF2B5EF4-FFF2-40B4-BE49-F238E27FC236}">
-                <a16:creationId xmlns:a16="http://schemas.microsoft.com/office/drawing/2014/main" id="{78233B7F-B2A6-4D60-9EB7-841B02AA5C4C}"/>
+                <a16:creationId xmlns:a16="http://schemas.microsoft.com/office/drawing/2014/main" id="{4E2D2C13-A78D-4C09-B823-2FF5E9EDBCD2}"/>
               </a:ext>
             </a:extLst>
           </p:cNvPr>
@@ -6022,7 +6022,7 @@
           <p:cNvPr id="10" name="">
             <a:extLst xmlns:a="http://schemas.openxmlformats.org/drawingml/2006/main">
               <a:ext uri="{FF2B5EF4-FFF2-40B4-BE49-F238E27FC236}">
-                <a16:creationId xmlns:a16="http://schemas.microsoft.com/office/drawing/2014/main" id="{959DD28B-A617-49D8-A852-36AE191D05E6}"/>
+                <a16:creationId xmlns:a16="http://schemas.microsoft.com/office/drawing/2014/main" id="{CC2A0656-0854-44C1-9C90-74A92C80E69A}"/>
               </a:ext>
             </a:extLst>
           </p:cNvPr>
@@ -6056,7 +6056,7 @@
           <p:cNvPr id="11" name="">
             <a:extLst xmlns:a="http://schemas.openxmlformats.org/drawingml/2006/main">
               <a:ext uri="{FF2B5EF4-FFF2-40B4-BE49-F238E27FC236}">
-                <a16:creationId xmlns:a16="http://schemas.microsoft.com/office/drawing/2014/main" id="{B903CD08-AFB7-4CEB-8D7C-7A8782071E9D}"/>
+                <a16:creationId xmlns:a16="http://schemas.microsoft.com/office/drawing/2014/main" id="{33C56583-7ECA-4170-90F2-9ED2BEF13FC3}"/>
               </a:ext>
             </a:extLst>
           </p:cNvPr>
@@ -6088,7 +6088,7 @@
           <p:cNvPr id="12" name="">
             <a:extLst xmlns:a="http://schemas.openxmlformats.org/drawingml/2006/main">
               <a:ext uri="{FF2B5EF4-FFF2-40B4-BE49-F238E27FC236}">
-                <a16:creationId xmlns:a16="http://schemas.microsoft.com/office/drawing/2014/main" id="{6FC8272D-7B5A-419B-B629-A57911A9EAED}"/>
+                <a16:creationId xmlns:a16="http://schemas.microsoft.com/office/drawing/2014/main" id="{D98B8002-1D75-408D-AEF4-EAD6F1E60682}"/>
               </a:ext>
             </a:extLst>
           </p:cNvPr>
@@ -6145,7 +6145,7 @@
           <p:cNvPr id="13" name="">
             <a:extLst xmlns:a="http://schemas.openxmlformats.org/drawingml/2006/main">
               <a:ext uri="{FF2B5EF4-FFF2-40B4-BE49-F238E27FC236}">
-                <a16:creationId xmlns:a16="http://schemas.microsoft.com/office/drawing/2014/main" id="{96316312-539C-49D2-8E4B-5EAEFF377B71}"/>
+                <a16:creationId xmlns:a16="http://schemas.microsoft.com/office/drawing/2014/main" id="{5CD4EE5A-BFC8-4DFE-88BE-0A47D50A9C12}"/>
               </a:ext>
             </a:extLst>
           </p:cNvPr>
@@ -6202,7 +6202,7 @@
           <p:cNvPr id="14" name="">
             <a:extLst xmlns:a="http://schemas.openxmlformats.org/drawingml/2006/main">
               <a:ext uri="{FF2B5EF4-FFF2-40B4-BE49-F238E27FC236}">
-                <a16:creationId xmlns:a16="http://schemas.microsoft.com/office/drawing/2014/main" id="{EEEC7842-1F34-4CF8-BB5A-5834E2FFAF45}"/>
+                <a16:creationId xmlns:a16="http://schemas.microsoft.com/office/drawing/2014/main" id="{52116E7F-7DFD-4E92-92A1-3AF77122865A}"/>
               </a:ext>
             </a:extLst>
           </p:cNvPr>
@@ -6236,7 +6236,7 @@
           <p:cNvPr id="15" name="">
             <a:extLst xmlns:a="http://schemas.openxmlformats.org/drawingml/2006/main">
               <a:ext uri="{FF2B5EF4-FFF2-40B4-BE49-F238E27FC236}">
-                <a16:creationId xmlns:a16="http://schemas.microsoft.com/office/drawing/2014/main" id="{43D3893B-A2CB-40E9-B988-149B8E01C913}"/>
+                <a16:creationId xmlns:a16="http://schemas.microsoft.com/office/drawing/2014/main" id="{627249F6-4F60-405F-A142-94328707D0D9}"/>
               </a:ext>
             </a:extLst>
           </p:cNvPr>
@@ -6268,7 +6268,7 @@
           <p:cNvPr id="16" name="">
             <a:extLst xmlns:a="http://schemas.openxmlformats.org/drawingml/2006/main">
               <a:ext uri="{FF2B5EF4-FFF2-40B4-BE49-F238E27FC236}">
-                <a16:creationId xmlns:a16="http://schemas.microsoft.com/office/drawing/2014/main" id="{A31599A6-0248-4EC4-9C16-1E67B0486227}"/>
+                <a16:creationId xmlns:a16="http://schemas.microsoft.com/office/drawing/2014/main" id="{1A285AEE-F989-4904-9F94-D24B64CB2A9E}"/>
               </a:ext>
             </a:extLst>
           </p:cNvPr>
@@ -6325,7 +6325,7 @@
           <p:cNvPr id="17" name="">
             <a:extLst xmlns:a="http://schemas.openxmlformats.org/drawingml/2006/main">
               <a:ext uri="{FF2B5EF4-FFF2-40B4-BE49-F238E27FC236}">
-                <a16:creationId xmlns:a16="http://schemas.microsoft.com/office/drawing/2014/main" id="{C1EF1065-0704-48BD-904E-A9D16C61A84E}"/>
+                <a16:creationId xmlns:a16="http://schemas.microsoft.com/office/drawing/2014/main" id="{54DD097B-FE0E-4753-9854-ECB45724525B}"/>
               </a:ext>
             </a:extLst>
           </p:cNvPr>
@@ -6382,7 +6382,7 @@
           <p:cNvPr id="18" name="">
             <a:extLst xmlns:a="http://schemas.openxmlformats.org/drawingml/2006/main">
               <a:ext uri="{FF2B5EF4-FFF2-40B4-BE49-F238E27FC236}">
-                <a16:creationId xmlns:a16="http://schemas.microsoft.com/office/drawing/2014/main" id="{EDDCC605-5AE0-46DA-A54F-1CCB1161BA0D}"/>
+                <a16:creationId xmlns:a16="http://schemas.microsoft.com/office/drawing/2014/main" id="{8E95E22E-84F3-4EBF-BBEA-169E1E3F98C3}"/>
               </a:ext>
             </a:extLst>
           </p:cNvPr>
@@ -6416,7 +6416,7 @@
           <p:cNvPr id="19" name="">
             <a:extLst xmlns:a="http://schemas.openxmlformats.org/drawingml/2006/main">
               <a:ext uri="{FF2B5EF4-FFF2-40B4-BE49-F238E27FC236}">
-                <a16:creationId xmlns:a16="http://schemas.microsoft.com/office/drawing/2014/main" id="{FDEE4956-7AF5-41D4-BD05-6401C9BF6A9F}"/>
+                <a16:creationId xmlns:a16="http://schemas.microsoft.com/office/drawing/2014/main" id="{C546734D-3EF2-4857-84F0-8895579FCC86}"/>
               </a:ext>
             </a:extLst>
           </p:cNvPr>
@@ -6448,7 +6448,7 @@
           <p:cNvPr id="20" name="">
             <a:extLst xmlns:a="http://schemas.openxmlformats.org/drawingml/2006/main">
               <a:ext uri="{FF2B5EF4-FFF2-40B4-BE49-F238E27FC236}">
-                <a16:creationId xmlns:a16="http://schemas.microsoft.com/office/drawing/2014/main" id="{876BF1CF-0E57-40B8-9533-B49E060F6EAB}"/>
+                <a16:creationId xmlns:a16="http://schemas.microsoft.com/office/drawing/2014/main" id="{D31CB677-CAEA-436B-8788-BBDD3CBA7FF5}"/>
               </a:ext>
             </a:extLst>
           </p:cNvPr>
@@ -6505,7 +6505,7 @@
           <p:cNvPr id="21" name="">
             <a:extLst xmlns:a="http://schemas.openxmlformats.org/drawingml/2006/main">
               <a:ext uri="{FF2B5EF4-FFF2-40B4-BE49-F238E27FC236}">
-                <a16:creationId xmlns:a16="http://schemas.microsoft.com/office/drawing/2014/main" id="{F48F1A30-81F1-4F99-A674-3D442B3EE035}"/>
+                <a16:creationId xmlns:a16="http://schemas.microsoft.com/office/drawing/2014/main" id="{9398F849-29AB-4B25-9561-329CA0E9492F}"/>
               </a:ext>
             </a:extLst>
           </p:cNvPr>
@@ -6562,7 +6562,7 @@
           <p:cNvPr id="22" name="">
             <a:extLst xmlns:a="http://schemas.openxmlformats.org/drawingml/2006/main">
               <a:ext uri="{FF2B5EF4-FFF2-40B4-BE49-F238E27FC236}">
-                <a16:creationId xmlns:a16="http://schemas.microsoft.com/office/drawing/2014/main" id="{D3E5EB9F-821F-4717-8771-319F390397AF}"/>
+                <a16:creationId xmlns:a16="http://schemas.microsoft.com/office/drawing/2014/main" id="{C7D3BDBB-F9F1-4432-962B-F9D8A904B351}"/>
               </a:ext>
             </a:extLst>
           </p:cNvPr>
@@ -6617,7 +6617,7 @@
     </p:spTree>
     <p:extLst>
       <p:ext uri="{BB962C8B-B14F-4D97-AF65-F5344CB8AC3E}">
-        <p14:creationId xmlns:p14="http://schemas.microsoft.com/office/powerpoint/2010/main" val="1146303995"/>
+        <p14:creationId xmlns:p14="http://schemas.microsoft.com/office/powerpoint/2010/main" val="677884728"/>
       </p:ext>
     </p:extLst>
   </p:cSld>
@@ -6818,7 +6818,7 @@
           <p:cNvPr id="16" name="">
             <a:extLst xmlns:a="http://schemas.openxmlformats.org/drawingml/2006/main">
               <a:ext uri="{FF2B5EF4-FFF2-40B4-BE49-F238E27FC236}">
-                <a16:creationId xmlns:a16="http://schemas.microsoft.com/office/drawing/2014/main" id="{A69BF049-5B85-45A6-9B83-78BE1C326659}"/>
+                <a16:creationId xmlns:a16="http://schemas.microsoft.com/office/drawing/2014/main" id="{450FAF36-D4E3-485C-9E0C-63AB8FA5133B}"/>
               </a:ext>
             </a:extLst>
           </p:cNvPr>
@@ -6850,7 +6850,7 @@
           <p:cNvPr id="2" name="">
             <a:extLst xmlns:a="http://schemas.openxmlformats.org/drawingml/2006/main">
               <a:ext uri="{FF2B5EF4-FFF2-40B4-BE49-F238E27FC236}">
-                <a16:creationId xmlns:a16="http://schemas.microsoft.com/office/drawing/2014/main" id="{9B6A42AE-0C03-493B-83B2-9E09D5CA33EA}"/>
+                <a16:creationId xmlns:a16="http://schemas.microsoft.com/office/drawing/2014/main" id="{2A2710D3-27AC-454C-8FF6-840C57628869}"/>
               </a:ext>
             </a:extLst>
           </p:cNvPr>
@@ -6907,7 +6907,7 @@
           <p:cNvPr id="3" name="">
             <a:extLst xmlns:a="http://schemas.openxmlformats.org/drawingml/2006/main">
               <a:ext uri="{FF2B5EF4-FFF2-40B4-BE49-F238E27FC236}">
-                <a16:creationId xmlns:a16="http://schemas.microsoft.com/office/drawing/2014/main" id="{A924E42D-8ECD-4B37-9786-D2E0743B1D64}"/>
+                <a16:creationId xmlns:a16="http://schemas.microsoft.com/office/drawing/2014/main" id="{DEBCF89B-F74A-4843-AEE1-443C8471868A}"/>
               </a:ext>
             </a:extLst>
           </p:cNvPr>
@@ -6939,7 +6939,7 @@
           <p:cNvPr id="4" name="">
             <a:extLst xmlns:a="http://schemas.openxmlformats.org/drawingml/2006/main">
               <a:ext uri="{FF2B5EF4-FFF2-40B4-BE49-F238E27FC236}">
-                <a16:creationId xmlns:a16="http://schemas.microsoft.com/office/drawing/2014/main" id="{6D3D2022-D143-48FF-8239-CC094DEC352C}"/>
+                <a16:creationId xmlns:a16="http://schemas.microsoft.com/office/drawing/2014/main" id="{AEE4BD8D-2493-4384-A0C3-5751B177DA15}"/>
               </a:ext>
             </a:extLst>
           </p:cNvPr>
@@ -6996,7 +6996,7 @@
           <p:cNvPr id="5" name="">
             <a:extLst xmlns:a="http://schemas.openxmlformats.org/drawingml/2006/main">
               <a:ext uri="{FF2B5EF4-FFF2-40B4-BE49-F238E27FC236}">
-                <a16:creationId xmlns:a16="http://schemas.microsoft.com/office/drawing/2014/main" id="{3009B779-35CC-4840-B0B5-1BF85EBC7DC3}"/>
+                <a16:creationId xmlns:a16="http://schemas.microsoft.com/office/drawing/2014/main" id="{15DE6DD2-BA87-4CFC-AFB0-A94F8966DF36}"/>
               </a:ext>
             </a:extLst>
           </p:cNvPr>
@@ -7053,7 +7053,7 @@
           <p:cNvPr id="6" name="">
             <a:extLst xmlns:a="http://schemas.openxmlformats.org/drawingml/2006/main">
               <a:ext uri="{FF2B5EF4-FFF2-40B4-BE49-F238E27FC236}">
-                <a16:creationId xmlns:a16="http://schemas.microsoft.com/office/drawing/2014/main" id="{7604BC51-2C37-48B2-8737-F279A10888E4}"/>
+                <a16:creationId xmlns:a16="http://schemas.microsoft.com/office/drawing/2014/main" id="{B6FA41E1-A170-4AA9-96CF-A419C8351F72}"/>
               </a:ext>
             </a:extLst>
           </p:cNvPr>
@@ -7110,7 +7110,7 @@
           <p:cNvPr id="7" name="">
             <a:extLst xmlns:a="http://schemas.openxmlformats.org/drawingml/2006/main">
               <a:ext uri="{FF2B5EF4-FFF2-40B4-BE49-F238E27FC236}">
-                <a16:creationId xmlns:a16="http://schemas.microsoft.com/office/drawing/2014/main" id="{378500C0-9333-4230-AD8E-1D70F23642C7}"/>
+                <a16:creationId xmlns:a16="http://schemas.microsoft.com/office/drawing/2014/main" id="{7EAC1726-71FB-4443-9EFC-E75F764528CB}"/>
               </a:ext>
             </a:extLst>
           </p:cNvPr>
@@ -7142,7 +7142,7 @@
           <p:cNvPr id="8" name="">
             <a:extLst xmlns:a="http://schemas.openxmlformats.org/drawingml/2006/main">
               <a:ext uri="{FF2B5EF4-FFF2-40B4-BE49-F238E27FC236}">
-                <a16:creationId xmlns:a16="http://schemas.microsoft.com/office/drawing/2014/main" id="{2596FAFF-56DE-4C8D-9A53-53958C0DD401}"/>
+                <a16:creationId xmlns:a16="http://schemas.microsoft.com/office/drawing/2014/main" id="{17644490-A064-4EA9-A592-2FC1FEC6216F}"/>
               </a:ext>
             </a:extLst>
           </p:cNvPr>
@@ -7199,7 +7199,7 @@
           <p:cNvPr id="9" name="">
             <a:extLst xmlns:a="http://schemas.openxmlformats.org/drawingml/2006/main">
               <a:ext uri="{FF2B5EF4-FFF2-40B4-BE49-F238E27FC236}">
-                <a16:creationId xmlns:a16="http://schemas.microsoft.com/office/drawing/2014/main" id="{C923C605-2858-42F5-B11F-9CE6D1FB0F78}"/>
+                <a16:creationId xmlns:a16="http://schemas.microsoft.com/office/drawing/2014/main" id="{75117996-0123-40DD-A311-0444708AD5F2}"/>
               </a:ext>
             </a:extLst>
           </p:cNvPr>
@@ -7256,7 +7256,7 @@
           <p:cNvPr id="10" name="">
             <a:extLst xmlns:a="http://schemas.openxmlformats.org/drawingml/2006/main">
               <a:ext uri="{FF2B5EF4-FFF2-40B4-BE49-F238E27FC236}">
-                <a16:creationId xmlns:a16="http://schemas.microsoft.com/office/drawing/2014/main" id="{2BC28C4D-84BC-458E-93F0-564C10B324B6}"/>
+                <a16:creationId xmlns:a16="http://schemas.microsoft.com/office/drawing/2014/main" id="{74D61A99-CA60-4306-BD8E-CA01E40527C5}"/>
               </a:ext>
             </a:extLst>
           </p:cNvPr>
@@ -7313,7 +7313,7 @@
           <p:cNvPr id="11" name="">
             <a:extLst xmlns:a="http://schemas.openxmlformats.org/drawingml/2006/main">
               <a:ext uri="{FF2B5EF4-FFF2-40B4-BE49-F238E27FC236}">
-                <a16:creationId xmlns:a16="http://schemas.microsoft.com/office/drawing/2014/main" id="{EFB96270-C6CD-40A2-AD45-FD96030B7844}"/>
+                <a16:creationId xmlns:a16="http://schemas.microsoft.com/office/drawing/2014/main" id="{B0F4391A-44AA-4F0C-83BB-FE4F8BB9F3BA}"/>
               </a:ext>
             </a:extLst>
           </p:cNvPr>
@@ -7345,7 +7345,7 @@
           <p:cNvPr id="12" name="">
             <a:extLst xmlns:a="http://schemas.openxmlformats.org/drawingml/2006/main">
               <a:ext uri="{FF2B5EF4-FFF2-40B4-BE49-F238E27FC236}">
-                <a16:creationId xmlns:a16="http://schemas.microsoft.com/office/drawing/2014/main" id="{48140797-EF3B-46F0-BD68-4DBED8D90E78}"/>
+                <a16:creationId xmlns:a16="http://schemas.microsoft.com/office/drawing/2014/main" id="{8DE2DE55-17B2-4B02-A531-6927D8D5C344}"/>
               </a:ext>
             </a:extLst>
           </p:cNvPr>
@@ -7402,7 +7402,7 @@
           <p:cNvPr id="13" name="">
             <a:extLst xmlns:a="http://schemas.openxmlformats.org/drawingml/2006/main">
               <a:ext uri="{FF2B5EF4-FFF2-40B4-BE49-F238E27FC236}">
-                <a16:creationId xmlns:a16="http://schemas.microsoft.com/office/drawing/2014/main" id="{32D1835C-E355-4CEB-B5FA-91E285D82F37}"/>
+                <a16:creationId xmlns:a16="http://schemas.microsoft.com/office/drawing/2014/main" id="{D29355F1-2BF7-4235-BF9F-BEC9EB81B0E3}"/>
               </a:ext>
             </a:extLst>
           </p:cNvPr>
@@ -7459,7 +7459,7 @@
           <p:cNvPr id="14" name="">
             <a:extLst xmlns:a="http://schemas.openxmlformats.org/drawingml/2006/main">
               <a:ext uri="{FF2B5EF4-FFF2-40B4-BE49-F238E27FC236}">
-                <a16:creationId xmlns:a16="http://schemas.microsoft.com/office/drawing/2014/main" id="{3C3555A3-8B96-4A0F-9F3A-4CF1EF89FF76}"/>
+                <a16:creationId xmlns:a16="http://schemas.microsoft.com/office/drawing/2014/main" id="{2D703F61-9451-47F8-855F-ED5375F8C9AD}"/>
               </a:ext>
             </a:extLst>
           </p:cNvPr>
@@ -7516,7 +7516,7 @@
           <p:cNvPr id="15" name="">
             <a:extLst xmlns:a="http://schemas.openxmlformats.org/drawingml/2006/main">
               <a:ext uri="{FF2B5EF4-FFF2-40B4-BE49-F238E27FC236}">
-                <a16:creationId xmlns:a16="http://schemas.microsoft.com/office/drawing/2014/main" id="{54F5F7A2-52D2-425C-AECA-35C2614BA47F}"/>
+                <a16:creationId xmlns:a16="http://schemas.microsoft.com/office/drawing/2014/main" id="{F7781FA6-DA4B-4A3A-B205-4324701486C1}"/>
               </a:ext>
             </a:extLst>
           </p:cNvPr>
@@ -7571,7 +7571,7 @@
     </p:spTree>
     <p:extLst>
       <p:ext uri="{BB962C8B-B14F-4D97-AF65-F5344CB8AC3E}">
-        <p14:creationId xmlns:p14="http://schemas.microsoft.com/office/powerpoint/2010/main" val="2841400"/>
+        <p14:creationId xmlns:p14="http://schemas.microsoft.com/office/powerpoint/2010/main" val="1886940206"/>
       </p:ext>
     </p:extLst>
   </p:cSld>
@@ -7772,7 +7772,7 @@
           <p:cNvPr id="23" name="">
             <a:extLst xmlns:a="http://schemas.openxmlformats.org/drawingml/2006/main">
               <a:ext uri="{FF2B5EF4-FFF2-40B4-BE49-F238E27FC236}">
-                <a16:creationId xmlns:a16="http://schemas.microsoft.com/office/drawing/2014/main" id="{9B4EDBAC-BF25-4225-B606-1BA5015A7818}"/>
+                <a16:creationId xmlns:a16="http://schemas.microsoft.com/office/drawing/2014/main" id="{701AEF9A-83E9-42FB-A656-0D85DED87480}"/>
               </a:ext>
             </a:extLst>
           </p:cNvPr>
@@ -7804,7 +7804,7 @@
           <p:cNvPr id="2" name="">
             <a:extLst xmlns:a="http://schemas.openxmlformats.org/drawingml/2006/main">
               <a:ext uri="{FF2B5EF4-FFF2-40B4-BE49-F238E27FC236}">
-                <a16:creationId xmlns:a16="http://schemas.microsoft.com/office/drawing/2014/main" id="{FBBB536F-FB98-409B-9E1D-5B8D7F7F3554}"/>
+                <a16:creationId xmlns:a16="http://schemas.microsoft.com/office/drawing/2014/main" id="{3139E10B-4CF9-40D1-9E79-5711F3A80397}"/>
               </a:ext>
             </a:extLst>
           </p:cNvPr>
@@ -7861,7 +7861,7 @@
           <p:cNvPr id="3" name="">
             <a:extLst xmlns:a="http://schemas.openxmlformats.org/drawingml/2006/main">
               <a:ext uri="{FF2B5EF4-FFF2-40B4-BE49-F238E27FC236}">
-                <a16:creationId xmlns:a16="http://schemas.microsoft.com/office/drawing/2014/main" id="{979B27AE-1432-4442-BF16-140DB9BC4ED6}"/>
+                <a16:creationId xmlns:a16="http://schemas.microsoft.com/office/drawing/2014/main" id="{48E661AE-510D-453A-89F3-D5C2E8FB99D7}"/>
               </a:ext>
             </a:extLst>
           </p:cNvPr>
@@ -7893,7 +7893,7 @@
           <p:cNvPr id="4" name="">
             <a:extLst xmlns:a="http://schemas.openxmlformats.org/drawingml/2006/main">
               <a:ext uri="{FF2B5EF4-FFF2-40B4-BE49-F238E27FC236}">
-                <a16:creationId xmlns:a16="http://schemas.microsoft.com/office/drawing/2014/main" id="{B8FDE5BB-1E06-4836-97EC-58467C5E1440}"/>
+                <a16:creationId xmlns:a16="http://schemas.microsoft.com/office/drawing/2014/main" id="{32842DE6-2374-4316-8E02-0679BB23F081}"/>
               </a:ext>
             </a:extLst>
           </p:cNvPr>
@@ -7950,7 +7950,7 @@
           <p:cNvPr id="5" name="">
             <a:extLst xmlns:a="http://schemas.openxmlformats.org/drawingml/2006/main">
               <a:ext uri="{FF2B5EF4-FFF2-40B4-BE49-F238E27FC236}">
-                <a16:creationId xmlns:a16="http://schemas.microsoft.com/office/drawing/2014/main" id="{62F9E6E4-1E73-4598-8122-B99BAD520851}"/>
+                <a16:creationId xmlns:a16="http://schemas.microsoft.com/office/drawing/2014/main" id="{AC54BD11-1501-4FD2-8128-4A35C16B8CBD}"/>
               </a:ext>
             </a:extLst>
           </p:cNvPr>
@@ -8007,7 +8007,7 @@
           <p:cNvPr id="6" name="">
             <a:extLst xmlns:a="http://schemas.openxmlformats.org/drawingml/2006/main">
               <a:ext uri="{FF2B5EF4-FFF2-40B4-BE49-F238E27FC236}">
-                <a16:creationId xmlns:a16="http://schemas.microsoft.com/office/drawing/2014/main" id="{D797C53A-E2B7-4319-9B26-0D60A1C92948}"/>
+                <a16:creationId xmlns:a16="http://schemas.microsoft.com/office/drawing/2014/main" id="{3A903F69-E360-4CB1-AA53-7BAE9598D674}"/>
               </a:ext>
             </a:extLst>
           </p:cNvPr>
@@ -8064,7 +8064,7 @@
           <p:cNvPr id="7" name="">
             <a:extLst xmlns:a="http://schemas.openxmlformats.org/drawingml/2006/main">
               <a:ext uri="{FF2B5EF4-FFF2-40B4-BE49-F238E27FC236}">
-                <a16:creationId xmlns:a16="http://schemas.microsoft.com/office/drawing/2014/main" id="{0B742258-C059-4B59-B7B4-E230F0EAE07A}"/>
+                <a16:creationId xmlns:a16="http://schemas.microsoft.com/office/drawing/2014/main" id="{04F2D0DE-E370-4C97-BDA0-54F1105B2D50}"/>
               </a:ext>
             </a:extLst>
           </p:cNvPr>
@@ -8096,7 +8096,7 @@
           <p:cNvPr id="8" name="">
             <a:extLst xmlns:a="http://schemas.openxmlformats.org/drawingml/2006/main">
               <a:ext uri="{FF2B5EF4-FFF2-40B4-BE49-F238E27FC236}">
-                <a16:creationId xmlns:a16="http://schemas.microsoft.com/office/drawing/2014/main" id="{09D360B9-45BF-4333-8525-B037E6ED9EE7}"/>
+                <a16:creationId xmlns:a16="http://schemas.microsoft.com/office/drawing/2014/main" id="{5EE8CC0B-579D-48ED-8742-79C078BE1BE9}"/>
               </a:ext>
             </a:extLst>
           </p:cNvPr>
@@ -8153,7 +8153,7 @@
           <p:cNvPr id="9" name="">
             <a:extLst xmlns:a="http://schemas.openxmlformats.org/drawingml/2006/main">
               <a:ext uri="{FF2B5EF4-FFF2-40B4-BE49-F238E27FC236}">
-                <a16:creationId xmlns:a16="http://schemas.microsoft.com/office/drawing/2014/main" id="{5B5D61EE-3F03-4BCB-9E43-155D43B9ACA1}"/>
+                <a16:creationId xmlns:a16="http://schemas.microsoft.com/office/drawing/2014/main" id="{6C842F9A-9B84-41FF-9CAF-E814A7A819FC}"/>
               </a:ext>
             </a:extLst>
           </p:cNvPr>
@@ -8210,19 +8210,19 @@
           <p:cNvPr id="10" name="">
             <a:extLst xmlns:a="http://schemas.openxmlformats.org/drawingml/2006/main">
               <a:ext uri="{FF2B5EF4-FFF2-40B4-BE49-F238E27FC236}">
-                <a16:creationId xmlns:a16="http://schemas.microsoft.com/office/drawing/2014/main" id="{47C9027F-C695-4D83-911E-717DE12D1BEB}"/>
-              </a:ext>
-            </a:extLst>
-          </p:cNvPr>
-          <p:cNvSpPr>
-            <a:spLocks xmlns:a="http://schemas.openxmlformats.org/drawingml/2006/main" noGrp="1"/>
-          </p:cNvSpPr>
-          <p:nvPr/>
-        </p:nvSpPr>
-        <p:spPr>
-          <a:xfrm xmlns:a="http://schemas.openxmlformats.org/drawingml/2006/main">
-            <a:off x="914400" y="1257300"/>
-            <a:ext cx="10363200" cy="781050"/>
+                <a16:creationId xmlns:a16="http://schemas.microsoft.com/office/drawing/2014/main" id="{369DD92A-E3FA-42D3-B30E-0E07EEF62F2B}"/>
+              </a:ext>
+            </a:extLst>
+          </p:cNvPr>
+          <p:cNvSpPr>
+            <a:spLocks xmlns:a="http://schemas.openxmlformats.org/drawingml/2006/main" noGrp="1"/>
+          </p:cNvSpPr>
+          <p:nvPr/>
+        </p:nvSpPr>
+        <p:spPr>
+          <a:xfrm xmlns:a="http://schemas.openxmlformats.org/drawingml/2006/main">
+            <a:off x="857250" y="1219200"/>
+            <a:ext cx="10477500" cy="742950"/>
           </a:xfrm>
           <a:prstGeom xmlns:a="http://schemas.openxmlformats.org/drawingml/2006/main" prst="rect">
             <a:avLst/>
@@ -8239,7 +8239,7 @@
           <a:lstStyle xmlns:a="http://schemas.openxmlformats.org/drawingml/2006/main"/>
           <a:p xmlns:a="http://schemas.openxmlformats.org/drawingml/2006/main">
             <a:pPr algn="ctr">
-              <a:defRPr sz="2175" b="1">
+              <a:defRPr sz="2100" b="1">
                 <a:solidFill>
                   <a:srgbClr val="17253A"/>
                 </a:solidFill>
@@ -8249,7 +8249,7 @@
               </a:defRPr>
             </a:pPr>
             <a:r>
-              <a:rPr sz="2175" b="1">
+              <a:rPr sz="2100" b="1">
                 <a:solidFill>
                   <a:srgbClr val="17253A"/>
                 </a:solidFill>
@@ -8267,28 +8267,30 @@
           <p:cNvPr id="11" name="">
             <a:extLst xmlns:a="http://schemas.openxmlformats.org/drawingml/2006/main">
               <a:ext uri="{FF2B5EF4-FFF2-40B4-BE49-F238E27FC236}">
-                <a16:creationId xmlns:a16="http://schemas.microsoft.com/office/drawing/2014/main" id="{A33388AA-DCF3-4F24-A004-0C26A8653A54}"/>
-              </a:ext>
-            </a:extLst>
-          </p:cNvPr>
-          <p:cNvSpPr>
-            <a:spLocks xmlns:a="http://schemas.openxmlformats.org/drawingml/2006/main" noGrp="1"/>
-          </p:cNvSpPr>
-          <p:nvPr/>
-        </p:nvSpPr>
-        <p:spPr>
-          <a:xfrm xmlns:a="http://schemas.openxmlformats.org/drawingml/2006/main">
-            <a:off x="1000125" y="2247900"/>
-            <a:ext cx="476250" cy="476250"/>
-          </a:xfrm>
-          <a:prstGeom xmlns:a="http://schemas.openxmlformats.org/drawingml/2006/main" prst="ellipse">
+                <a16:creationId xmlns:a16="http://schemas.microsoft.com/office/drawing/2014/main" id="{78E78795-B57F-4441-A2F9-0EA1DC13E120}"/>
+              </a:ext>
+            </a:extLst>
+          </p:cNvPr>
+          <p:cNvSpPr>
+            <a:spLocks xmlns:a="http://schemas.openxmlformats.org/drawingml/2006/main" noGrp="1"/>
+          </p:cNvSpPr>
+          <p:nvPr/>
+        </p:nvSpPr>
+        <p:spPr>
+          <a:xfrm xmlns:a="http://schemas.openxmlformats.org/drawingml/2006/main">
+            <a:off x="971550" y="2124075"/>
+            <a:ext cx="38100" cy="3524250"/>
+          </a:xfrm>
+          <a:prstGeom xmlns:a="http://schemas.openxmlformats.org/drawingml/2006/main" prst="rect">
             <a:avLst/>
           </a:prstGeom>
           <a:solidFill xmlns:a="http://schemas.openxmlformats.org/drawingml/2006/main">
-            <a:srgbClr val="18324A"/>
+            <a:srgbClr val="2C6E73"/>
           </a:solidFill>
           <a:ln xmlns:a="http://schemas.openxmlformats.org/drawingml/2006/main" w="0">
-            <a:noFill/>
+            <a:solidFill>
+              <a:srgbClr val="2C6E73"/>
+            </a:solidFill>
           </a:ln>
         </p:spPr>
       </p:sp>
@@ -8297,19 +8299,19 @@
           <p:cNvPr id="12" name="">
             <a:extLst xmlns:a="http://schemas.openxmlformats.org/drawingml/2006/main">
               <a:ext uri="{FF2B5EF4-FFF2-40B4-BE49-F238E27FC236}">
-                <a16:creationId xmlns:a16="http://schemas.microsoft.com/office/drawing/2014/main" id="{331B2EE5-EBBF-42F1-8761-29AA24F4E7C8}"/>
-              </a:ext>
-            </a:extLst>
-          </p:cNvPr>
-          <p:cNvSpPr>
-            <a:spLocks xmlns:a="http://schemas.openxmlformats.org/drawingml/2006/main" noGrp="1"/>
-          </p:cNvSpPr>
-          <p:nvPr/>
-        </p:nvSpPr>
-        <p:spPr>
-          <a:xfrm xmlns:a="http://schemas.openxmlformats.org/drawingml/2006/main">
-            <a:off x="1000125" y="2276475"/>
-            <a:ext cx="476250" cy="419100"/>
+                <a16:creationId xmlns:a16="http://schemas.microsoft.com/office/drawing/2014/main" id="{8B41046E-3250-4DA0-99C2-D0B17F538859}"/>
+              </a:ext>
+            </a:extLst>
+          </p:cNvPr>
+          <p:cNvSpPr>
+            <a:spLocks xmlns:a="http://schemas.openxmlformats.org/drawingml/2006/main" noGrp="1"/>
+          </p:cNvSpPr>
+          <p:nvPr/>
+        </p:nvSpPr>
+        <p:spPr>
+          <a:xfrm xmlns:a="http://schemas.openxmlformats.org/drawingml/2006/main">
+            <a:off x="1162050" y="2200275"/>
+            <a:ext cx="400050" cy="400050"/>
           </a:xfrm>
           <a:prstGeom xmlns:a="http://schemas.openxmlformats.org/drawingml/2006/main" prst="rect">
             <a:avLst/>
@@ -8326,9 +8328,9 @@
           <a:lstStyle xmlns:a="http://schemas.openxmlformats.org/drawingml/2006/main"/>
           <a:p xmlns:a="http://schemas.openxmlformats.org/drawingml/2006/main">
             <a:pPr algn="ctr">
-              <a:defRPr sz="1350" b="1">
-                <a:solidFill>
-                  <a:srgbClr val="FFFFFF"/>
+              <a:defRPr sz="1125" b="1">
+                <a:solidFill>
+                  <a:srgbClr val="2C6E73"/>
                 </a:solidFill>
                 <a:latin typeface="Arial"/>
                 <a:ea typeface="Arial"/>
@@ -8336,9 +8338,9 @@
               </a:defRPr>
             </a:pPr>
             <a:r>
-              <a:rPr sz="1350" b="1">
-                <a:solidFill>
-                  <a:srgbClr val="FFFFFF"/>
+              <a:rPr sz="1125" b="1">
+                <a:solidFill>
+                  <a:srgbClr val="2C6E73"/>
                 </a:solidFill>
                 <a:latin typeface="Arial"/>
                 <a:ea typeface="Arial"/>
@@ -8354,19 +8356,19 @@
           <p:cNvPr id="13" name="">
             <a:extLst xmlns:a="http://schemas.openxmlformats.org/drawingml/2006/main">
               <a:ext uri="{FF2B5EF4-FFF2-40B4-BE49-F238E27FC236}">
-                <a16:creationId xmlns:a16="http://schemas.microsoft.com/office/drawing/2014/main" id="{7CFB53FC-C2E3-4052-A95A-09928C6F76D4}"/>
-              </a:ext>
-            </a:extLst>
-          </p:cNvPr>
-          <p:cNvSpPr>
-            <a:spLocks xmlns:a="http://schemas.openxmlformats.org/drawingml/2006/main" noGrp="1"/>
-          </p:cNvSpPr>
-          <p:nvPr/>
-        </p:nvSpPr>
-        <p:spPr>
-          <a:xfrm xmlns:a="http://schemas.openxmlformats.org/drawingml/2006/main">
-            <a:off x="1714500" y="2181225"/>
-            <a:ext cx="9429750" cy="609600"/>
+                <a16:creationId xmlns:a16="http://schemas.microsoft.com/office/drawing/2014/main" id="{9042389C-B3F7-4E5B-B548-904EAD4F7A76}"/>
+              </a:ext>
+            </a:extLst>
+          </p:cNvPr>
+          <p:cNvSpPr>
+            <a:spLocks xmlns:a="http://schemas.openxmlformats.org/drawingml/2006/main" noGrp="1"/>
+          </p:cNvSpPr>
+          <p:nvPr/>
+        </p:nvSpPr>
+        <p:spPr>
+          <a:xfrm xmlns:a="http://schemas.openxmlformats.org/drawingml/2006/main">
+            <a:off x="1714500" y="2114550"/>
+            <a:ext cx="9525000" cy="809625"/>
           </a:xfrm>
           <a:prstGeom xmlns:a="http://schemas.openxmlformats.org/drawingml/2006/main" prst="rect">
             <a:avLst/>
@@ -8383,7 +8385,7 @@
           <a:lstStyle xmlns:a="http://schemas.openxmlformats.org/drawingml/2006/main"/>
           <a:p xmlns:a="http://schemas.openxmlformats.org/drawingml/2006/main">
             <a:pPr algn="l">
-              <a:defRPr sz="1500" b="0">
+              <a:defRPr sz="1725" b="0">
                 <a:solidFill>
                   <a:srgbClr val="17253A"/>
                 </a:solidFill>
@@ -8393,7 +8395,7 @@
               </a:defRPr>
             </a:pPr>
             <a:r>
-              <a:rPr sz="1500" b="0">
+              <a:rPr sz="1725" b="0">
                 <a:solidFill>
                   <a:srgbClr val="17253A"/>
                 </a:solidFill>
@@ -8401,7 +8403,7 @@
                 <a:ea typeface="Arial"/>
                 <a:cs typeface="Arial"/>
               </a:rPr>
-              <a:t>Identify the structure: Identify the goal, constraints and useful information before calculating.</a:t>
+              <a:t>Cuboid volume = 12 × 8 × 5 = 480 cm³</a:t>
             </a:r>
           </a:p>
         </p:txBody>
@@ -8411,28 +8413,30 @@
           <p:cNvPr id="14" name="">
             <a:extLst xmlns:a="http://schemas.openxmlformats.org/drawingml/2006/main">
               <a:ext uri="{FF2B5EF4-FFF2-40B4-BE49-F238E27FC236}">
-                <a16:creationId xmlns:a16="http://schemas.microsoft.com/office/drawing/2014/main" id="{6229EB02-8B67-4F6A-BBFE-C1630B78CC9B}"/>
-              </a:ext>
-            </a:extLst>
-          </p:cNvPr>
-          <p:cNvSpPr>
-            <a:spLocks xmlns:a="http://schemas.openxmlformats.org/drawingml/2006/main" noGrp="1"/>
-          </p:cNvSpPr>
-          <p:nvPr/>
-        </p:nvSpPr>
-        <p:spPr>
-          <a:xfrm xmlns:a="http://schemas.openxmlformats.org/drawingml/2006/main">
-            <a:off x="1000125" y="2990850"/>
-            <a:ext cx="476250" cy="476250"/>
-          </a:xfrm>
-          <a:prstGeom xmlns:a="http://schemas.openxmlformats.org/drawingml/2006/main" prst="ellipse">
+                <a16:creationId xmlns:a16="http://schemas.microsoft.com/office/drawing/2014/main" id="{0C0A5764-4A66-41A3-8CDF-D9AE3677390E}"/>
+              </a:ext>
+            </a:extLst>
+          </p:cNvPr>
+          <p:cNvSpPr>
+            <a:spLocks xmlns:a="http://schemas.openxmlformats.org/drawingml/2006/main" noGrp="1"/>
+          </p:cNvSpPr>
+          <p:nvPr/>
+        </p:nvSpPr>
+        <p:spPr>
+          <a:xfrm xmlns:a="http://schemas.openxmlformats.org/drawingml/2006/main">
+            <a:off x="1714500" y="2943225"/>
+            <a:ext cx="9334500" cy="9525"/>
+          </a:xfrm>
+          <a:prstGeom xmlns:a="http://schemas.openxmlformats.org/drawingml/2006/main" prst="rect">
             <a:avLst/>
           </a:prstGeom>
           <a:solidFill xmlns:a="http://schemas.openxmlformats.org/drawingml/2006/main">
-            <a:srgbClr val="2C6E73"/>
+            <a:srgbClr val="D9E0E6"/>
           </a:solidFill>
           <a:ln xmlns:a="http://schemas.openxmlformats.org/drawingml/2006/main" w="0">
-            <a:noFill/>
+            <a:solidFill>
+              <a:srgbClr val="D9E0E6"/>
+            </a:solidFill>
           </a:ln>
         </p:spPr>
       </p:sp>
@@ -8441,19 +8445,19 @@
           <p:cNvPr id="15" name="">
             <a:extLst xmlns:a="http://schemas.openxmlformats.org/drawingml/2006/main">
               <a:ext uri="{FF2B5EF4-FFF2-40B4-BE49-F238E27FC236}">
-                <a16:creationId xmlns:a16="http://schemas.microsoft.com/office/drawing/2014/main" id="{1D6D7E66-08B7-419A-8B06-3366A52BA159}"/>
-              </a:ext>
-            </a:extLst>
-          </p:cNvPr>
-          <p:cNvSpPr>
-            <a:spLocks xmlns:a="http://schemas.openxmlformats.org/drawingml/2006/main" noGrp="1"/>
-          </p:cNvSpPr>
-          <p:nvPr/>
-        </p:nvSpPr>
-        <p:spPr>
-          <a:xfrm xmlns:a="http://schemas.openxmlformats.org/drawingml/2006/main">
-            <a:off x="1000125" y="3019425"/>
-            <a:ext cx="476250" cy="419100"/>
+                <a16:creationId xmlns:a16="http://schemas.microsoft.com/office/drawing/2014/main" id="{A6FA4DD9-F417-4653-9E31-32B9F2DE5D4A}"/>
+              </a:ext>
+            </a:extLst>
+          </p:cNvPr>
+          <p:cNvSpPr>
+            <a:spLocks xmlns:a="http://schemas.openxmlformats.org/drawingml/2006/main" noGrp="1"/>
+          </p:cNvSpPr>
+          <p:nvPr/>
+        </p:nvSpPr>
+        <p:spPr>
+          <a:xfrm xmlns:a="http://schemas.openxmlformats.org/drawingml/2006/main">
+            <a:off x="1162050" y="3076575"/>
+            <a:ext cx="400050" cy="400050"/>
           </a:xfrm>
           <a:prstGeom xmlns:a="http://schemas.openxmlformats.org/drawingml/2006/main" prst="rect">
             <a:avLst/>
@@ -8470,9 +8474,9 @@
           <a:lstStyle xmlns:a="http://schemas.openxmlformats.org/drawingml/2006/main"/>
           <a:p xmlns:a="http://schemas.openxmlformats.org/drawingml/2006/main">
             <a:pPr algn="ctr">
-              <a:defRPr sz="1350" b="1">
-                <a:solidFill>
-                  <a:srgbClr val="FFFFFF"/>
+              <a:defRPr sz="1125" b="1">
+                <a:solidFill>
+                  <a:srgbClr val="2C6E73"/>
                 </a:solidFill>
                 <a:latin typeface="Arial"/>
                 <a:ea typeface="Arial"/>
@@ -8480,9 +8484,9 @@
               </a:defRPr>
             </a:pPr>
             <a:r>
-              <a:rPr sz="1350" b="1">
-                <a:solidFill>
-                  <a:srgbClr val="FFFFFF"/>
+              <a:rPr sz="1125" b="1">
+                <a:solidFill>
+                  <a:srgbClr val="2C6E73"/>
                 </a:solidFill>
                 <a:latin typeface="Arial"/>
                 <a:ea typeface="Arial"/>
@@ -8498,19 +8502,19 @@
           <p:cNvPr id="16" name="">
             <a:extLst xmlns:a="http://schemas.openxmlformats.org/drawingml/2006/main">
               <a:ext uri="{FF2B5EF4-FFF2-40B4-BE49-F238E27FC236}">
-                <a16:creationId xmlns:a16="http://schemas.microsoft.com/office/drawing/2014/main" id="{F598FD4F-9B77-4B1A-B1F8-35FEF1B3979F}"/>
-              </a:ext>
-            </a:extLst>
-          </p:cNvPr>
-          <p:cNvSpPr>
-            <a:spLocks xmlns:a="http://schemas.openxmlformats.org/drawingml/2006/main" noGrp="1"/>
-          </p:cNvSpPr>
-          <p:nvPr/>
-        </p:nvSpPr>
-        <p:spPr>
-          <a:xfrm xmlns:a="http://schemas.openxmlformats.org/drawingml/2006/main">
-            <a:off x="1714500" y="2924175"/>
-            <a:ext cx="9429750" cy="609600"/>
+                <a16:creationId xmlns:a16="http://schemas.microsoft.com/office/drawing/2014/main" id="{02B6A198-B0CD-4D9D-84E8-0F03D4E1EBE0}"/>
+              </a:ext>
+            </a:extLst>
+          </p:cNvPr>
+          <p:cNvSpPr>
+            <a:spLocks xmlns:a="http://schemas.openxmlformats.org/drawingml/2006/main" noGrp="1"/>
+          </p:cNvSpPr>
+          <p:nvPr/>
+        </p:nvSpPr>
+        <p:spPr>
+          <a:xfrm xmlns:a="http://schemas.openxmlformats.org/drawingml/2006/main">
+            <a:off x="1714500" y="2990850"/>
+            <a:ext cx="9525000" cy="809625"/>
           </a:xfrm>
           <a:prstGeom xmlns:a="http://schemas.openxmlformats.org/drawingml/2006/main" prst="rect">
             <a:avLst/>
@@ -8527,7 +8531,7 @@
           <a:lstStyle xmlns:a="http://schemas.openxmlformats.org/drawingml/2006/main"/>
           <a:p xmlns:a="http://schemas.openxmlformats.org/drawingml/2006/main">
             <a:pPr algn="l">
-              <a:defRPr sz="1500" b="0">
+              <a:defRPr sz="1725" b="0">
                 <a:solidFill>
                   <a:srgbClr val="17253A"/>
                 </a:solidFill>
@@ -8537,7 +8541,7 @@
               </a:defRPr>
             </a:pPr>
             <a:r>
-              <a:rPr sz="1500" b="0">
+              <a:rPr sz="1725" b="0">
                 <a:solidFill>
                   <a:srgbClr val="17253A"/>
                 </a:solidFill>
@@ -8545,7 +8549,7 @@
                 <a:ea typeface="Arial"/>
                 <a:cs typeface="Arial"/>
               </a:rPr>
-              <a:t>Set up the method: Choose a representation and complete each labelled step.</a:t>
+              <a:t>Filled volume = 1/3 × 480 = 160 cm³</a:t>
             </a:r>
           </a:p>
         </p:txBody>
@@ -8555,28 +8559,30 @@
           <p:cNvPr id="17" name="">
             <a:extLst xmlns:a="http://schemas.openxmlformats.org/drawingml/2006/main">
               <a:ext uri="{FF2B5EF4-FFF2-40B4-BE49-F238E27FC236}">
-                <a16:creationId xmlns:a16="http://schemas.microsoft.com/office/drawing/2014/main" id="{5ACE6367-AE7C-474D-B54C-C5D169E7C65C}"/>
-              </a:ext>
-            </a:extLst>
-          </p:cNvPr>
-          <p:cNvSpPr>
-            <a:spLocks xmlns:a="http://schemas.openxmlformats.org/drawingml/2006/main" noGrp="1"/>
-          </p:cNvSpPr>
-          <p:nvPr/>
-        </p:nvSpPr>
-        <p:spPr>
-          <a:xfrm xmlns:a="http://schemas.openxmlformats.org/drawingml/2006/main">
-            <a:off x="1000125" y="3733800"/>
-            <a:ext cx="476250" cy="476250"/>
-          </a:xfrm>
-          <a:prstGeom xmlns:a="http://schemas.openxmlformats.org/drawingml/2006/main" prst="ellipse">
+                <a16:creationId xmlns:a16="http://schemas.microsoft.com/office/drawing/2014/main" id="{78EC277D-B0DF-4A6B-9661-865B2F46E3EE}"/>
+              </a:ext>
+            </a:extLst>
+          </p:cNvPr>
+          <p:cNvSpPr>
+            <a:spLocks xmlns:a="http://schemas.openxmlformats.org/drawingml/2006/main" noGrp="1"/>
+          </p:cNvSpPr>
+          <p:nvPr/>
+        </p:nvSpPr>
+        <p:spPr>
+          <a:xfrm xmlns:a="http://schemas.openxmlformats.org/drawingml/2006/main">
+            <a:off x="1714500" y="3819525"/>
+            <a:ext cx="9334500" cy="9525"/>
+          </a:xfrm>
+          <a:prstGeom xmlns:a="http://schemas.openxmlformats.org/drawingml/2006/main" prst="rect">
             <a:avLst/>
           </a:prstGeom>
           <a:solidFill xmlns:a="http://schemas.openxmlformats.org/drawingml/2006/main">
-            <a:srgbClr val="2C6E73"/>
+            <a:srgbClr val="D9E0E6"/>
           </a:solidFill>
           <a:ln xmlns:a="http://schemas.openxmlformats.org/drawingml/2006/main" w="0">
-            <a:noFill/>
+            <a:solidFill>
+              <a:srgbClr val="D9E0E6"/>
+            </a:solidFill>
           </a:ln>
         </p:spPr>
       </p:sp>
@@ -8585,19 +8591,19 @@
           <p:cNvPr id="18" name="">
             <a:extLst xmlns:a="http://schemas.openxmlformats.org/drawingml/2006/main">
               <a:ext uri="{FF2B5EF4-FFF2-40B4-BE49-F238E27FC236}">
-                <a16:creationId xmlns:a16="http://schemas.microsoft.com/office/drawing/2014/main" id="{F9FBB0FF-C4BE-42A5-B3DA-897313AF062D}"/>
-              </a:ext>
-            </a:extLst>
-          </p:cNvPr>
-          <p:cNvSpPr>
-            <a:spLocks xmlns:a="http://schemas.openxmlformats.org/drawingml/2006/main" noGrp="1"/>
-          </p:cNvSpPr>
-          <p:nvPr/>
-        </p:nvSpPr>
-        <p:spPr>
-          <a:xfrm xmlns:a="http://schemas.openxmlformats.org/drawingml/2006/main">
-            <a:off x="1000125" y="3762375"/>
-            <a:ext cx="476250" cy="419100"/>
+                <a16:creationId xmlns:a16="http://schemas.microsoft.com/office/drawing/2014/main" id="{A14EEDCB-AA6F-409B-A897-101E59F994DA}"/>
+              </a:ext>
+            </a:extLst>
+          </p:cNvPr>
+          <p:cNvSpPr>
+            <a:spLocks xmlns:a="http://schemas.openxmlformats.org/drawingml/2006/main" noGrp="1"/>
+          </p:cNvSpPr>
+          <p:nvPr/>
+        </p:nvSpPr>
+        <p:spPr>
+          <a:xfrm xmlns:a="http://schemas.openxmlformats.org/drawingml/2006/main">
+            <a:off x="1162050" y="3952875"/>
+            <a:ext cx="400050" cy="400050"/>
           </a:xfrm>
           <a:prstGeom xmlns:a="http://schemas.openxmlformats.org/drawingml/2006/main" prst="rect">
             <a:avLst/>
@@ -8614,9 +8620,9 @@
           <a:lstStyle xmlns:a="http://schemas.openxmlformats.org/drawingml/2006/main"/>
           <a:p xmlns:a="http://schemas.openxmlformats.org/drawingml/2006/main">
             <a:pPr algn="ctr">
-              <a:defRPr sz="1350" b="1">
-                <a:solidFill>
-                  <a:srgbClr val="FFFFFF"/>
+              <a:defRPr sz="1125" b="1">
+                <a:solidFill>
+                  <a:srgbClr val="2C6E73"/>
                 </a:solidFill>
                 <a:latin typeface="Arial"/>
                 <a:ea typeface="Arial"/>
@@ -8624,9 +8630,9 @@
               </a:defRPr>
             </a:pPr>
             <a:r>
-              <a:rPr sz="1350" b="1">
-                <a:solidFill>
-                  <a:srgbClr val="FFFFFF"/>
+              <a:rPr sz="1125" b="1">
+                <a:solidFill>
+                  <a:srgbClr val="2C6E73"/>
                 </a:solidFill>
                 <a:latin typeface="Arial"/>
                 <a:ea typeface="Arial"/>
@@ -8642,19 +8648,19 @@
           <p:cNvPr id="19" name="">
             <a:extLst xmlns:a="http://schemas.openxmlformats.org/drawingml/2006/main">
               <a:ext uri="{FF2B5EF4-FFF2-40B4-BE49-F238E27FC236}">
-                <a16:creationId xmlns:a16="http://schemas.microsoft.com/office/drawing/2014/main" id="{FED96D1C-CDB9-4BDA-A9B1-9EE72BD59981}"/>
-              </a:ext>
-            </a:extLst>
-          </p:cNvPr>
-          <p:cNvSpPr>
-            <a:spLocks xmlns:a="http://schemas.openxmlformats.org/drawingml/2006/main" noGrp="1"/>
-          </p:cNvSpPr>
-          <p:nvPr/>
-        </p:nvSpPr>
-        <p:spPr>
-          <a:xfrm xmlns:a="http://schemas.openxmlformats.org/drawingml/2006/main">
-            <a:off x="1714500" y="3667125"/>
-            <a:ext cx="9429750" cy="609600"/>
+                <a16:creationId xmlns:a16="http://schemas.microsoft.com/office/drawing/2014/main" id="{FB8EC82D-6617-48F2-B2CC-0F0B6DC96900}"/>
+              </a:ext>
+            </a:extLst>
+          </p:cNvPr>
+          <p:cNvSpPr>
+            <a:spLocks xmlns:a="http://schemas.openxmlformats.org/drawingml/2006/main" noGrp="1"/>
+          </p:cNvSpPr>
+          <p:nvPr/>
+        </p:nvSpPr>
+        <p:spPr>
+          <a:xfrm xmlns:a="http://schemas.openxmlformats.org/drawingml/2006/main">
+            <a:off x="1714500" y="3867150"/>
+            <a:ext cx="9525000" cy="809625"/>
           </a:xfrm>
           <a:prstGeom xmlns:a="http://schemas.openxmlformats.org/drawingml/2006/main" prst="rect">
             <a:avLst/>
@@ -8671,7 +8677,7 @@
           <a:lstStyle xmlns:a="http://schemas.openxmlformats.org/drawingml/2006/main"/>
           <a:p xmlns:a="http://schemas.openxmlformats.org/drawingml/2006/main">
             <a:pPr algn="l">
-              <a:defRPr sz="1500" b="0">
+              <a:defRPr sz="1725" b="0">
                 <a:solidFill>
                   <a:srgbClr val="17253A"/>
                 </a:solidFill>
@@ -8681,7 +8687,7 @@
               </a:defRPr>
             </a:pPr>
             <a:r>
-              <a:rPr sz="1500" b="0">
+              <a:rPr sz="1725" b="0">
                 <a:solidFill>
                   <a:srgbClr val="17253A"/>
                 </a:solidFill>
@@ -8689,7 +8695,7 @@
                 <a:ea typeface="Arial"/>
                 <a:cs typeface="Arial"/>
               </a:rPr>
-              <a:t>Complete the calculation: 320 cm3.</a:t>
+              <a:t>Empty volume = 480 - 160</a:t>
             </a:r>
           </a:p>
         </p:txBody>
@@ -8699,28 +8705,30 @@
           <p:cNvPr id="20" name="">
             <a:extLst xmlns:a="http://schemas.openxmlformats.org/drawingml/2006/main">
               <a:ext uri="{FF2B5EF4-FFF2-40B4-BE49-F238E27FC236}">
-                <a16:creationId xmlns:a16="http://schemas.microsoft.com/office/drawing/2014/main" id="{6074A6ED-6DA7-4ECF-B889-B475FDF792DC}"/>
-              </a:ext>
-            </a:extLst>
-          </p:cNvPr>
-          <p:cNvSpPr>
-            <a:spLocks xmlns:a="http://schemas.openxmlformats.org/drawingml/2006/main" noGrp="1"/>
-          </p:cNvSpPr>
-          <p:nvPr/>
-        </p:nvSpPr>
-        <p:spPr>
-          <a:xfrm xmlns:a="http://schemas.openxmlformats.org/drawingml/2006/main">
-            <a:off x="1000125" y="4476750"/>
-            <a:ext cx="476250" cy="476250"/>
-          </a:xfrm>
-          <a:prstGeom xmlns:a="http://schemas.openxmlformats.org/drawingml/2006/main" prst="ellipse">
+                <a16:creationId xmlns:a16="http://schemas.microsoft.com/office/drawing/2014/main" id="{AFBD00BB-B1BE-4D3A-BC65-8E1B8F2E40A0}"/>
+              </a:ext>
+            </a:extLst>
+          </p:cNvPr>
+          <p:cNvSpPr>
+            <a:spLocks xmlns:a="http://schemas.openxmlformats.org/drawingml/2006/main" noGrp="1"/>
+          </p:cNvSpPr>
+          <p:nvPr/>
+        </p:nvSpPr>
+        <p:spPr>
+          <a:xfrm xmlns:a="http://schemas.openxmlformats.org/drawingml/2006/main">
+            <a:off x="1714500" y="4695825"/>
+            <a:ext cx="9334500" cy="9525"/>
+          </a:xfrm>
+          <a:prstGeom xmlns:a="http://schemas.openxmlformats.org/drawingml/2006/main" prst="rect">
             <a:avLst/>
           </a:prstGeom>
           <a:solidFill xmlns:a="http://schemas.openxmlformats.org/drawingml/2006/main">
-            <a:srgbClr val="2C6E73"/>
+            <a:srgbClr val="D9E0E6"/>
           </a:solidFill>
           <a:ln xmlns:a="http://schemas.openxmlformats.org/drawingml/2006/main" w="0">
-            <a:noFill/>
+            <a:solidFill>
+              <a:srgbClr val="D9E0E6"/>
+            </a:solidFill>
           </a:ln>
         </p:spPr>
       </p:sp>
@@ -8729,19 +8737,19 @@
           <p:cNvPr id="21" name="">
             <a:extLst xmlns:a="http://schemas.openxmlformats.org/drawingml/2006/main">
               <a:ext uri="{FF2B5EF4-FFF2-40B4-BE49-F238E27FC236}">
-                <a16:creationId xmlns:a16="http://schemas.microsoft.com/office/drawing/2014/main" id="{CF8EEA05-FDEC-44D1-BC78-EC411B5921C6}"/>
-              </a:ext>
-            </a:extLst>
-          </p:cNvPr>
-          <p:cNvSpPr>
-            <a:spLocks xmlns:a="http://schemas.openxmlformats.org/drawingml/2006/main" noGrp="1"/>
-          </p:cNvSpPr>
-          <p:nvPr/>
-        </p:nvSpPr>
-        <p:spPr>
-          <a:xfrm xmlns:a="http://schemas.openxmlformats.org/drawingml/2006/main">
-            <a:off x="1000125" y="4505325"/>
-            <a:ext cx="476250" cy="419100"/>
+                <a16:creationId xmlns:a16="http://schemas.microsoft.com/office/drawing/2014/main" id="{58FBBFA0-03A3-48FC-8AA8-3652363455D6}"/>
+              </a:ext>
+            </a:extLst>
+          </p:cNvPr>
+          <p:cNvSpPr>
+            <a:spLocks xmlns:a="http://schemas.openxmlformats.org/drawingml/2006/main" noGrp="1"/>
+          </p:cNvSpPr>
+          <p:nvPr/>
+        </p:nvSpPr>
+        <p:spPr>
+          <a:xfrm xmlns:a="http://schemas.openxmlformats.org/drawingml/2006/main">
+            <a:off x="1162050" y="4829175"/>
+            <a:ext cx="400050" cy="400050"/>
           </a:xfrm>
           <a:prstGeom xmlns:a="http://schemas.openxmlformats.org/drawingml/2006/main" prst="rect">
             <a:avLst/>
@@ -8758,9 +8766,9 @@
           <a:lstStyle xmlns:a="http://schemas.openxmlformats.org/drawingml/2006/main"/>
           <a:p xmlns:a="http://schemas.openxmlformats.org/drawingml/2006/main">
             <a:pPr algn="ctr">
-              <a:defRPr sz="1350" b="1">
-                <a:solidFill>
-                  <a:srgbClr val="FFFFFF"/>
+              <a:defRPr sz="1125" b="1">
+                <a:solidFill>
+                  <a:srgbClr val="2F785D"/>
                 </a:solidFill>
                 <a:latin typeface="Arial"/>
                 <a:ea typeface="Arial"/>
@@ -8768,9 +8776,9 @@
               </a:defRPr>
             </a:pPr>
             <a:r>
-              <a:rPr sz="1350" b="1">
-                <a:solidFill>
-                  <a:srgbClr val="FFFFFF"/>
+              <a:rPr sz="1125" b="1">
+                <a:solidFill>
+                  <a:srgbClr val="2F785D"/>
                 </a:solidFill>
                 <a:latin typeface="Arial"/>
                 <a:ea typeface="Arial"/>
@@ -8786,19 +8794,19 @@
           <p:cNvPr id="22" name="">
             <a:extLst xmlns:a="http://schemas.openxmlformats.org/drawingml/2006/main">
               <a:ext uri="{FF2B5EF4-FFF2-40B4-BE49-F238E27FC236}">
-                <a16:creationId xmlns:a16="http://schemas.microsoft.com/office/drawing/2014/main" id="{5BF7043D-BF69-493A-BA29-11F775FABFBF}"/>
-              </a:ext>
-            </a:extLst>
-          </p:cNvPr>
-          <p:cNvSpPr>
-            <a:spLocks xmlns:a="http://schemas.openxmlformats.org/drawingml/2006/main" noGrp="1"/>
-          </p:cNvSpPr>
-          <p:nvPr/>
-        </p:nvSpPr>
-        <p:spPr>
-          <a:xfrm xmlns:a="http://schemas.openxmlformats.org/drawingml/2006/main">
-            <a:off x="1714500" y="4410075"/>
-            <a:ext cx="9429750" cy="609600"/>
+                <a16:creationId xmlns:a16="http://schemas.microsoft.com/office/drawing/2014/main" id="{2B7EB1D4-BD76-4D66-B84C-B114328CBFDA}"/>
+              </a:ext>
+            </a:extLst>
+          </p:cNvPr>
+          <p:cNvSpPr>
+            <a:spLocks xmlns:a="http://schemas.openxmlformats.org/drawingml/2006/main" noGrp="1"/>
+          </p:cNvSpPr>
+          <p:nvPr/>
+        </p:nvSpPr>
+        <p:spPr>
+          <a:xfrm xmlns:a="http://schemas.openxmlformats.org/drawingml/2006/main">
+            <a:off x="1714500" y="4743450"/>
+            <a:ext cx="9525000" cy="809625"/>
           </a:xfrm>
           <a:prstGeom xmlns:a="http://schemas.openxmlformats.org/drawingml/2006/main" prst="rect">
             <a:avLst/>
@@ -8815,7 +8823,7 @@
           <a:lstStyle xmlns:a="http://schemas.openxmlformats.org/drawingml/2006/main"/>
           <a:p xmlns:a="http://schemas.openxmlformats.org/drawingml/2006/main">
             <a:pPr algn="l">
-              <a:defRPr sz="1500" b="1">
+              <a:defRPr sz="1725" b="1">
                 <a:solidFill>
                   <a:srgbClr val="2F785D"/>
                 </a:solidFill>
@@ -8825,7 +8833,7 @@
               </a:defRPr>
             </a:pPr>
             <a:r>
-              <a:rPr sz="1500" b="1">
+              <a:rPr sz="1725" b="1">
                 <a:solidFill>
                   <a:srgbClr val="2F785D"/>
                 </a:solidFill>
@@ -8833,7 +8841,7 @@
                 <a:ea typeface="Arial"/>
                 <a:cs typeface="Arial"/>
               </a:rPr>
-              <a:t>Check the result: Check the solution and explain why it satisfies every condition.</a:t>
+              <a:t>320 cm³ remains empty</a:t>
             </a:r>
           </a:p>
         </p:txBody>
@@ -8841,7 +8849,7 @@
     </p:spTree>
     <p:extLst>
       <p:ext uri="{BB962C8B-B14F-4D97-AF65-F5344CB8AC3E}">
-        <p14:creationId xmlns:p14="http://schemas.microsoft.com/office/powerpoint/2010/main" val="86689410"/>
+        <p14:creationId xmlns:p14="http://schemas.microsoft.com/office/powerpoint/2010/main" val="1668911734"/>
       </p:ext>
     </p:extLst>
   </p:cSld>
@@ -9134,7 +9142,7 @@
           <p:cNvPr id="15" name="">
             <a:extLst xmlns:a="http://schemas.openxmlformats.org/drawingml/2006/main">
               <a:ext uri="{FF2B5EF4-FFF2-40B4-BE49-F238E27FC236}">
-                <a16:creationId xmlns:a16="http://schemas.microsoft.com/office/drawing/2014/main" id="{EE62621B-7103-4CD1-9BAC-A1B1DC6E7FCB}"/>
+                <a16:creationId xmlns:a16="http://schemas.microsoft.com/office/drawing/2014/main" id="{B7783728-F544-4CD1-99D1-986254A88F53}"/>
               </a:ext>
             </a:extLst>
           </p:cNvPr>
@@ -9166,7 +9174,7 @@
           <p:cNvPr id="2" name="">
             <a:extLst xmlns:a="http://schemas.openxmlformats.org/drawingml/2006/main">
               <a:ext uri="{FF2B5EF4-FFF2-40B4-BE49-F238E27FC236}">
-                <a16:creationId xmlns:a16="http://schemas.microsoft.com/office/drawing/2014/main" id="{D3DF2E1E-41FD-4C40-85C9-2A8D8DDFFE28}"/>
+                <a16:creationId xmlns:a16="http://schemas.microsoft.com/office/drawing/2014/main" id="{31B73BCD-D1E0-4BCA-9320-459CA64D9D66}"/>
               </a:ext>
             </a:extLst>
           </p:cNvPr>
@@ -9223,7 +9231,7 @@
           <p:cNvPr id="3" name="">
             <a:extLst xmlns:a="http://schemas.openxmlformats.org/drawingml/2006/main">
               <a:ext uri="{FF2B5EF4-FFF2-40B4-BE49-F238E27FC236}">
-                <a16:creationId xmlns:a16="http://schemas.microsoft.com/office/drawing/2014/main" id="{A05C0F18-4E9D-4CDD-8A13-AC640975E08D}"/>
+                <a16:creationId xmlns:a16="http://schemas.microsoft.com/office/drawing/2014/main" id="{890A625D-21AC-4EEF-A2BA-255D46C397D1}"/>
               </a:ext>
             </a:extLst>
           </p:cNvPr>
@@ -9255,7 +9263,7 @@
           <p:cNvPr id="4" name="">
             <a:extLst xmlns:a="http://schemas.openxmlformats.org/drawingml/2006/main">
               <a:ext uri="{FF2B5EF4-FFF2-40B4-BE49-F238E27FC236}">
-                <a16:creationId xmlns:a16="http://schemas.microsoft.com/office/drawing/2014/main" id="{4CC71EA2-351B-4C84-B63D-4EC17685E0C0}"/>
+                <a16:creationId xmlns:a16="http://schemas.microsoft.com/office/drawing/2014/main" id="{36C35D12-E263-4280-9BFB-9CC0F398E0A9}"/>
               </a:ext>
             </a:extLst>
           </p:cNvPr>
@@ -9312,7 +9320,7 @@
           <p:cNvPr id="5" name="">
             <a:extLst xmlns:a="http://schemas.openxmlformats.org/drawingml/2006/main">
               <a:ext uri="{FF2B5EF4-FFF2-40B4-BE49-F238E27FC236}">
-                <a16:creationId xmlns:a16="http://schemas.microsoft.com/office/drawing/2014/main" id="{404747E5-1690-412C-9845-17976C4A458B}"/>
+                <a16:creationId xmlns:a16="http://schemas.microsoft.com/office/drawing/2014/main" id="{07C1414B-32D4-42E0-A945-8D7D683ACB49}"/>
               </a:ext>
             </a:extLst>
           </p:cNvPr>
@@ -9369,7 +9377,7 @@
           <p:cNvPr id="6" name="">
             <a:extLst xmlns:a="http://schemas.openxmlformats.org/drawingml/2006/main">
               <a:ext uri="{FF2B5EF4-FFF2-40B4-BE49-F238E27FC236}">
-                <a16:creationId xmlns:a16="http://schemas.microsoft.com/office/drawing/2014/main" id="{E89EFC62-FA05-4DB3-BC48-6FD8C643FCC9}"/>
+                <a16:creationId xmlns:a16="http://schemas.microsoft.com/office/drawing/2014/main" id="{F9A305FC-6972-4808-B6AD-A3B417DDF9D1}"/>
               </a:ext>
             </a:extLst>
           </p:cNvPr>
@@ -9426,7 +9434,7 @@
           <p:cNvPr id="7" name="">
             <a:extLst xmlns:a="http://schemas.openxmlformats.org/drawingml/2006/main">
               <a:ext uri="{FF2B5EF4-FFF2-40B4-BE49-F238E27FC236}">
-                <a16:creationId xmlns:a16="http://schemas.microsoft.com/office/drawing/2014/main" id="{71F6B6FB-92AD-43DB-B5FC-899573A17A60}"/>
+                <a16:creationId xmlns:a16="http://schemas.microsoft.com/office/drawing/2014/main" id="{76923FA6-E895-4B98-958E-80EBDA979AC2}"/>
               </a:ext>
             </a:extLst>
           </p:cNvPr>
@@ -9458,7 +9466,7 @@
           <p:cNvPr id="8" name="">
             <a:extLst xmlns:a="http://schemas.openxmlformats.org/drawingml/2006/main">
               <a:ext uri="{FF2B5EF4-FFF2-40B4-BE49-F238E27FC236}">
-                <a16:creationId xmlns:a16="http://schemas.microsoft.com/office/drawing/2014/main" id="{D9C63D92-04B7-4B96-AE05-3ECFC096635A}"/>
+                <a16:creationId xmlns:a16="http://schemas.microsoft.com/office/drawing/2014/main" id="{CE1CCE7B-FB64-48F2-9570-8B6F8D2FD426}"/>
               </a:ext>
             </a:extLst>
           </p:cNvPr>
@@ -9515,7 +9523,7 @@
           <p:cNvPr id="9" name="">
             <a:extLst xmlns:a="http://schemas.openxmlformats.org/drawingml/2006/main">
               <a:ext uri="{FF2B5EF4-FFF2-40B4-BE49-F238E27FC236}">
-                <a16:creationId xmlns:a16="http://schemas.microsoft.com/office/drawing/2014/main" id="{E280607E-4C4A-44CE-9865-5742F3B7D9D3}"/>
+                <a16:creationId xmlns:a16="http://schemas.microsoft.com/office/drawing/2014/main" id="{CB4F3573-13A8-4110-99E6-0A899B32232C}"/>
               </a:ext>
             </a:extLst>
           </p:cNvPr>
@@ -9572,7 +9580,7 @@
           <p:cNvPr id="10" name="">
             <a:extLst xmlns:a="http://schemas.openxmlformats.org/drawingml/2006/main">
               <a:ext uri="{FF2B5EF4-FFF2-40B4-BE49-F238E27FC236}">
-                <a16:creationId xmlns:a16="http://schemas.microsoft.com/office/drawing/2014/main" id="{FDF80EB2-7CA3-4977-AD86-749EE0040245}"/>
+                <a16:creationId xmlns:a16="http://schemas.microsoft.com/office/drawing/2014/main" id="{31625489-1FBB-4318-ACE9-6C6830285217}"/>
               </a:ext>
             </a:extLst>
           </p:cNvPr>
@@ -9629,7 +9637,7 @@
           <p:cNvPr id="11" name="">
             <a:extLst xmlns:a="http://schemas.openxmlformats.org/drawingml/2006/main">
               <a:ext uri="{FF2B5EF4-FFF2-40B4-BE49-F238E27FC236}">
-                <a16:creationId xmlns:a16="http://schemas.microsoft.com/office/drawing/2014/main" id="{58872149-B1CA-4C88-91E5-A9C70B16DAB7}"/>
+                <a16:creationId xmlns:a16="http://schemas.microsoft.com/office/drawing/2014/main" id="{8B636B71-2C9F-4275-B83F-CF21D30DD475}"/>
               </a:ext>
             </a:extLst>
           </p:cNvPr>
@@ -9686,7 +9694,7 @@
           <p:cNvPr id="12" name="">
             <a:extLst xmlns:a="http://schemas.openxmlformats.org/drawingml/2006/main">
               <a:ext uri="{FF2B5EF4-FFF2-40B4-BE49-F238E27FC236}">
-                <a16:creationId xmlns:a16="http://schemas.microsoft.com/office/drawing/2014/main" id="{DFCB2C52-AE8D-4A0E-8F63-6C3B7B5A6FB5}"/>
+                <a16:creationId xmlns:a16="http://schemas.microsoft.com/office/drawing/2014/main" id="{1FE03662-F27A-4FC2-BF6A-B0EF40A1989B}"/>
               </a:ext>
             </a:extLst>
           </p:cNvPr>
@@ -9718,7 +9726,7 @@
           <p:cNvPr id="13" name="">
             <a:extLst xmlns:a="http://schemas.openxmlformats.org/drawingml/2006/main">
               <a:ext uri="{FF2B5EF4-FFF2-40B4-BE49-F238E27FC236}">
-                <a16:creationId xmlns:a16="http://schemas.microsoft.com/office/drawing/2014/main" id="{3204BDF9-B4AA-4734-932F-BCA31CC62911}"/>
+                <a16:creationId xmlns:a16="http://schemas.microsoft.com/office/drawing/2014/main" id="{981F8C40-0745-4AB8-BEB2-D9F8BFD9EE7C}"/>
               </a:ext>
             </a:extLst>
           </p:cNvPr>
@@ -9775,7 +9783,7 @@
           <p:cNvPr id="14" name="">
             <a:extLst xmlns:a="http://schemas.openxmlformats.org/drawingml/2006/main">
               <a:ext uri="{FF2B5EF4-FFF2-40B4-BE49-F238E27FC236}">
-                <a16:creationId xmlns:a16="http://schemas.microsoft.com/office/drawing/2014/main" id="{8CA7B6C2-A302-4E5F-9C58-14B17C86BEBE}"/>
+                <a16:creationId xmlns:a16="http://schemas.microsoft.com/office/drawing/2014/main" id="{21F76121-74D2-4AD9-8DF1-0235203D7501}"/>
               </a:ext>
             </a:extLst>
           </p:cNvPr>
@@ -9830,7 +9838,7 @@
     </p:spTree>
     <p:extLst>
       <p:ext uri="{BB962C8B-B14F-4D97-AF65-F5344CB8AC3E}">
-        <p14:creationId xmlns:p14="http://schemas.microsoft.com/office/powerpoint/2010/main" val="2027965434"/>
+        <p14:creationId xmlns:p14="http://schemas.microsoft.com/office/powerpoint/2010/main" val="612419182"/>
       </p:ext>
     </p:extLst>
   </p:cSld>
@@ -10031,7 +10039,7 @@
           <p:cNvPr id="16" name="">
             <a:extLst xmlns:a="http://schemas.openxmlformats.org/drawingml/2006/main">
               <a:ext uri="{FF2B5EF4-FFF2-40B4-BE49-F238E27FC236}">
-                <a16:creationId xmlns:a16="http://schemas.microsoft.com/office/drawing/2014/main" id="{E94C4647-9100-4309-AFAF-52BD562A921C}"/>
+                <a16:creationId xmlns:a16="http://schemas.microsoft.com/office/drawing/2014/main" id="{16AFFBF7-AB7B-41F9-BB25-2E96674688AB}"/>
               </a:ext>
             </a:extLst>
           </p:cNvPr>
@@ -10063,7 +10071,7 @@
           <p:cNvPr id="2" name="">
             <a:extLst xmlns:a="http://schemas.openxmlformats.org/drawingml/2006/main">
               <a:ext uri="{FF2B5EF4-FFF2-40B4-BE49-F238E27FC236}">
-                <a16:creationId xmlns:a16="http://schemas.microsoft.com/office/drawing/2014/main" id="{47766D02-1C75-4F52-B8FA-076A7C002540}"/>
+                <a16:creationId xmlns:a16="http://schemas.microsoft.com/office/drawing/2014/main" id="{7EF4FF30-C0A4-45FB-9089-E10D7A737719}"/>
               </a:ext>
             </a:extLst>
           </p:cNvPr>
@@ -10120,7 +10128,7 @@
           <p:cNvPr id="3" name="">
             <a:extLst xmlns:a="http://schemas.openxmlformats.org/drawingml/2006/main">
               <a:ext uri="{FF2B5EF4-FFF2-40B4-BE49-F238E27FC236}">
-                <a16:creationId xmlns:a16="http://schemas.microsoft.com/office/drawing/2014/main" id="{121CD2B3-81C4-4CDF-981C-5C913B92E843}"/>
+                <a16:creationId xmlns:a16="http://schemas.microsoft.com/office/drawing/2014/main" id="{54C99E6C-B11A-43B9-A8ED-EAC91235092A}"/>
               </a:ext>
             </a:extLst>
           </p:cNvPr>
@@ -10152,7 +10160,7 @@
           <p:cNvPr id="4" name="">
             <a:extLst xmlns:a="http://schemas.openxmlformats.org/drawingml/2006/main">
               <a:ext uri="{FF2B5EF4-FFF2-40B4-BE49-F238E27FC236}">
-                <a16:creationId xmlns:a16="http://schemas.microsoft.com/office/drawing/2014/main" id="{84D155B7-6ECB-4C4A-9E56-D4D48CF62DE8}"/>
+                <a16:creationId xmlns:a16="http://schemas.microsoft.com/office/drawing/2014/main" id="{B78233E1-587D-451D-8F03-2822024427A7}"/>
               </a:ext>
             </a:extLst>
           </p:cNvPr>
@@ -10209,7 +10217,7 @@
           <p:cNvPr id="5" name="">
             <a:extLst xmlns:a="http://schemas.openxmlformats.org/drawingml/2006/main">
               <a:ext uri="{FF2B5EF4-FFF2-40B4-BE49-F238E27FC236}">
-                <a16:creationId xmlns:a16="http://schemas.microsoft.com/office/drawing/2014/main" id="{9F7F28E7-2C10-4D6E-A4EF-28A7B84C95DA}"/>
+                <a16:creationId xmlns:a16="http://schemas.microsoft.com/office/drawing/2014/main" id="{CF11DDD6-CC58-4FB8-BF11-06C133DC08A3}"/>
               </a:ext>
             </a:extLst>
           </p:cNvPr>
@@ -10266,7 +10274,7 @@
           <p:cNvPr id="6" name="">
             <a:extLst xmlns:a="http://schemas.openxmlformats.org/drawingml/2006/main">
               <a:ext uri="{FF2B5EF4-FFF2-40B4-BE49-F238E27FC236}">
-                <a16:creationId xmlns:a16="http://schemas.microsoft.com/office/drawing/2014/main" id="{63C2E688-8133-4919-9C72-FF517A768173}"/>
+                <a16:creationId xmlns:a16="http://schemas.microsoft.com/office/drawing/2014/main" id="{22B417D1-D5C6-40F6-BCCC-342568D2C468}"/>
               </a:ext>
             </a:extLst>
           </p:cNvPr>
@@ -10323,7 +10331,7 @@
           <p:cNvPr id="7" name="">
             <a:extLst xmlns:a="http://schemas.openxmlformats.org/drawingml/2006/main">
               <a:ext uri="{FF2B5EF4-FFF2-40B4-BE49-F238E27FC236}">
-                <a16:creationId xmlns:a16="http://schemas.microsoft.com/office/drawing/2014/main" id="{55A6941B-A0E1-4E0C-B32C-DFF3E76E7330}"/>
+                <a16:creationId xmlns:a16="http://schemas.microsoft.com/office/drawing/2014/main" id="{3C64F960-7726-4916-9B66-2EF97D09B540}"/>
               </a:ext>
             </a:extLst>
           </p:cNvPr>
@@ -10355,7 +10363,7 @@
           <p:cNvPr id="8" name="">
             <a:extLst xmlns:a="http://schemas.openxmlformats.org/drawingml/2006/main">
               <a:ext uri="{FF2B5EF4-FFF2-40B4-BE49-F238E27FC236}">
-                <a16:creationId xmlns:a16="http://schemas.microsoft.com/office/drawing/2014/main" id="{878B9AB9-FE2B-4B45-AA9C-EF1689C977E6}"/>
+                <a16:creationId xmlns:a16="http://schemas.microsoft.com/office/drawing/2014/main" id="{1FB3767E-247A-42C2-A626-70CBE1A7678D}"/>
               </a:ext>
             </a:extLst>
           </p:cNvPr>
@@ -10412,7 +10420,7 @@
           <p:cNvPr id="9" name="">
             <a:extLst xmlns:a="http://schemas.openxmlformats.org/drawingml/2006/main">
               <a:ext uri="{FF2B5EF4-FFF2-40B4-BE49-F238E27FC236}">
-                <a16:creationId xmlns:a16="http://schemas.microsoft.com/office/drawing/2014/main" id="{7A5254B7-8D14-4B74-B74D-1A635FAF71A3}"/>
+                <a16:creationId xmlns:a16="http://schemas.microsoft.com/office/drawing/2014/main" id="{3A49E1A0-29DA-4706-8EE5-47AAA82FEFE8}"/>
               </a:ext>
             </a:extLst>
           </p:cNvPr>
@@ -10469,7 +10477,7 @@
           <p:cNvPr id="10" name="">
             <a:extLst xmlns:a="http://schemas.openxmlformats.org/drawingml/2006/main">
               <a:ext uri="{FF2B5EF4-FFF2-40B4-BE49-F238E27FC236}">
-                <a16:creationId xmlns:a16="http://schemas.microsoft.com/office/drawing/2014/main" id="{EAC7077E-443F-4C90-9820-3B4F54F321B0}"/>
+                <a16:creationId xmlns:a16="http://schemas.microsoft.com/office/drawing/2014/main" id="{ABE48B57-04BB-4485-A40B-09AA4CFA1DC1}"/>
               </a:ext>
             </a:extLst>
           </p:cNvPr>
@@ -10526,7 +10534,7 @@
           <p:cNvPr id="11" name="">
             <a:extLst xmlns:a="http://schemas.openxmlformats.org/drawingml/2006/main">
               <a:ext uri="{FF2B5EF4-FFF2-40B4-BE49-F238E27FC236}">
-                <a16:creationId xmlns:a16="http://schemas.microsoft.com/office/drawing/2014/main" id="{E53130C8-95E4-4B72-BD0E-0A17878A7BA0}"/>
+                <a16:creationId xmlns:a16="http://schemas.microsoft.com/office/drawing/2014/main" id="{CCEBA7D5-BD9F-4F99-B5C1-53C28D570209}"/>
               </a:ext>
             </a:extLst>
           </p:cNvPr>
@@ -10583,7 +10591,7 @@
           <p:cNvPr id="12" name="">
             <a:extLst xmlns:a="http://schemas.openxmlformats.org/drawingml/2006/main">
               <a:ext uri="{FF2B5EF4-FFF2-40B4-BE49-F238E27FC236}">
-                <a16:creationId xmlns:a16="http://schemas.microsoft.com/office/drawing/2014/main" id="{71AA71CD-690E-4FD8-BB73-68FF148A761E}"/>
+                <a16:creationId xmlns:a16="http://schemas.microsoft.com/office/drawing/2014/main" id="{57264056-6B38-40C4-AAE5-28065FBCC6E3}"/>
               </a:ext>
             </a:extLst>
           </p:cNvPr>
@@ -10640,7 +10648,7 @@
           <p:cNvPr id="13" name="">
             <a:extLst xmlns:a="http://schemas.openxmlformats.org/drawingml/2006/main">
               <a:ext uri="{FF2B5EF4-FFF2-40B4-BE49-F238E27FC236}">
-                <a16:creationId xmlns:a16="http://schemas.microsoft.com/office/drawing/2014/main" id="{0ED7ACAC-F950-4CA2-BC5B-3025FB9D7DF0}"/>
+                <a16:creationId xmlns:a16="http://schemas.microsoft.com/office/drawing/2014/main" id="{B5163E36-9279-4443-9FCC-FB38917CBF40}"/>
               </a:ext>
             </a:extLst>
           </p:cNvPr>
@@ -10697,7 +10705,7 @@
           <p:cNvPr id="14" name="">
             <a:extLst xmlns:a="http://schemas.openxmlformats.org/drawingml/2006/main">
               <a:ext uri="{FF2B5EF4-FFF2-40B4-BE49-F238E27FC236}">
-                <a16:creationId xmlns:a16="http://schemas.microsoft.com/office/drawing/2014/main" id="{C23AA064-CB51-4BF8-915F-6E7DF74EBA49}"/>
+                <a16:creationId xmlns:a16="http://schemas.microsoft.com/office/drawing/2014/main" id="{F9EB0BBB-2F21-4C82-BB2A-F93CD05CA71C}"/>
               </a:ext>
             </a:extLst>
           </p:cNvPr>
@@ -10754,7 +10762,7 @@
           <p:cNvPr id="15" name="">
             <a:extLst xmlns:a="http://schemas.openxmlformats.org/drawingml/2006/main">
               <a:ext uri="{FF2B5EF4-FFF2-40B4-BE49-F238E27FC236}">
-                <a16:creationId xmlns:a16="http://schemas.microsoft.com/office/drawing/2014/main" id="{5952EBDC-59CE-4E93-8665-91E0CD302528}"/>
+                <a16:creationId xmlns:a16="http://schemas.microsoft.com/office/drawing/2014/main" id="{6B65797D-7F80-431D-B52E-FEF937E4B19F}"/>
               </a:ext>
             </a:extLst>
           </p:cNvPr>
@@ -10809,7 +10817,7 @@
     </p:spTree>
     <p:extLst>
       <p:ext uri="{BB962C8B-B14F-4D97-AF65-F5344CB8AC3E}">
-        <p14:creationId xmlns:p14="http://schemas.microsoft.com/office/powerpoint/2010/main" val="491357376"/>
+        <p14:creationId xmlns:p14="http://schemas.microsoft.com/office/powerpoint/2010/main" val="862799080"/>
       </p:ext>
     </p:extLst>
   </p:cSld>
@@ -10964,7 +10972,7 @@
           <p:cNvPr id="16" name="">
             <a:extLst xmlns:a="http://schemas.openxmlformats.org/drawingml/2006/main">
               <a:ext uri="{FF2B5EF4-FFF2-40B4-BE49-F238E27FC236}">
-                <a16:creationId xmlns:a16="http://schemas.microsoft.com/office/drawing/2014/main" id="{52E4C0A3-EAFE-4261-AEE9-77DA3B0AA43E}"/>
+                <a16:creationId xmlns:a16="http://schemas.microsoft.com/office/drawing/2014/main" id="{940140BA-975C-4391-B006-90E1BA068014}"/>
               </a:ext>
             </a:extLst>
           </p:cNvPr>
@@ -10996,7 +11004,7 @@
           <p:cNvPr id="2" name="">
             <a:extLst xmlns:a="http://schemas.openxmlformats.org/drawingml/2006/main">
               <a:ext uri="{FF2B5EF4-FFF2-40B4-BE49-F238E27FC236}">
-                <a16:creationId xmlns:a16="http://schemas.microsoft.com/office/drawing/2014/main" id="{6B04DCA0-A5B0-499F-8C50-FF5D3AB860D1}"/>
+                <a16:creationId xmlns:a16="http://schemas.microsoft.com/office/drawing/2014/main" id="{83055C2F-B67F-4A85-B17B-5407869E0FFF}"/>
               </a:ext>
             </a:extLst>
           </p:cNvPr>
@@ -11053,7 +11061,7 @@
           <p:cNvPr id="3" name="">
             <a:extLst xmlns:a="http://schemas.openxmlformats.org/drawingml/2006/main">
               <a:ext uri="{FF2B5EF4-FFF2-40B4-BE49-F238E27FC236}">
-                <a16:creationId xmlns:a16="http://schemas.microsoft.com/office/drawing/2014/main" id="{59A05CC2-96E1-4D32-ABF9-655D91C97256}"/>
+                <a16:creationId xmlns:a16="http://schemas.microsoft.com/office/drawing/2014/main" id="{2A17D628-FC26-4C5F-AE68-DC8AF2A047F4}"/>
               </a:ext>
             </a:extLst>
           </p:cNvPr>
@@ -11085,7 +11093,7 @@
           <p:cNvPr id="4" name="">
             <a:extLst xmlns:a="http://schemas.openxmlformats.org/drawingml/2006/main">
               <a:ext uri="{FF2B5EF4-FFF2-40B4-BE49-F238E27FC236}">
-                <a16:creationId xmlns:a16="http://schemas.microsoft.com/office/drawing/2014/main" id="{58F90832-3677-46E6-A4C3-A8F4B18E3A2B}"/>
+                <a16:creationId xmlns:a16="http://schemas.microsoft.com/office/drawing/2014/main" id="{5F31816A-3B7C-44E3-AF90-1041959C2206}"/>
               </a:ext>
             </a:extLst>
           </p:cNvPr>
@@ -11142,7 +11150,7 @@
           <p:cNvPr id="5" name="">
             <a:extLst xmlns:a="http://schemas.openxmlformats.org/drawingml/2006/main">
               <a:ext uri="{FF2B5EF4-FFF2-40B4-BE49-F238E27FC236}">
-                <a16:creationId xmlns:a16="http://schemas.microsoft.com/office/drawing/2014/main" id="{A079BA85-8A15-4984-9AF1-0559AFF39C2D}"/>
+                <a16:creationId xmlns:a16="http://schemas.microsoft.com/office/drawing/2014/main" id="{DD510853-8D66-4EA9-AE1A-A3E2F215218B}"/>
               </a:ext>
             </a:extLst>
           </p:cNvPr>
@@ -11199,7 +11207,7 @@
           <p:cNvPr id="6" name="">
             <a:extLst xmlns:a="http://schemas.openxmlformats.org/drawingml/2006/main">
               <a:ext uri="{FF2B5EF4-FFF2-40B4-BE49-F238E27FC236}">
-                <a16:creationId xmlns:a16="http://schemas.microsoft.com/office/drawing/2014/main" id="{4B580DFC-EE7C-4E70-8F83-52CD3EBD69A7}"/>
+                <a16:creationId xmlns:a16="http://schemas.microsoft.com/office/drawing/2014/main" id="{88AD613C-032B-4B6C-ADB7-9C3C124FF932}"/>
               </a:ext>
             </a:extLst>
           </p:cNvPr>
@@ -11256,7 +11264,7 @@
           <p:cNvPr id="7" name="">
             <a:extLst xmlns:a="http://schemas.openxmlformats.org/drawingml/2006/main">
               <a:ext uri="{FF2B5EF4-FFF2-40B4-BE49-F238E27FC236}">
-                <a16:creationId xmlns:a16="http://schemas.microsoft.com/office/drawing/2014/main" id="{D33DB61B-6CDB-417F-A715-9298B66A3109}"/>
+                <a16:creationId xmlns:a16="http://schemas.microsoft.com/office/drawing/2014/main" id="{AA847528-E50E-47B2-8AE5-439384C3CB99}"/>
               </a:ext>
             </a:extLst>
           </p:cNvPr>
@@ -11288,7 +11296,7 @@
           <p:cNvPr id="8" name="">
             <a:extLst xmlns:a="http://schemas.openxmlformats.org/drawingml/2006/main">
               <a:ext uri="{FF2B5EF4-FFF2-40B4-BE49-F238E27FC236}">
-                <a16:creationId xmlns:a16="http://schemas.microsoft.com/office/drawing/2014/main" id="{3A8E4669-AAC9-4A19-B116-48F918A7EF26}"/>
+                <a16:creationId xmlns:a16="http://schemas.microsoft.com/office/drawing/2014/main" id="{3566F246-3DE6-4695-906A-65027C14772E}"/>
               </a:ext>
             </a:extLst>
           </p:cNvPr>
@@ -11345,7 +11353,7 @@
           <p:cNvPr id="9" name="">
             <a:extLst xmlns:a="http://schemas.openxmlformats.org/drawingml/2006/main">
               <a:ext uri="{FF2B5EF4-FFF2-40B4-BE49-F238E27FC236}">
-                <a16:creationId xmlns:a16="http://schemas.microsoft.com/office/drawing/2014/main" id="{FB3D89C3-9A59-4BA2-B61A-DD00AFF2ACC2}"/>
+                <a16:creationId xmlns:a16="http://schemas.microsoft.com/office/drawing/2014/main" id="{173DEAC8-8EC1-44AF-A6A1-F86AB922C7B0}"/>
               </a:ext>
             </a:extLst>
           </p:cNvPr>
@@ -11406,7 +11414,7 @@
           <p:nvPr/>
         </p:nvPicPr>
         <p:blipFill>
-          <a:blip xmlns:r="http://schemas.openxmlformats.org/officeDocument/2006/relationships" xmlns:a="http://schemas.openxmlformats.org/drawingml/2006/main" r:embed="Rd73c00b542034feb"/>
+          <a:blip xmlns:r="http://schemas.openxmlformats.org/officeDocument/2006/relationships" xmlns:a="http://schemas.openxmlformats.org/drawingml/2006/main" r:embed="R0d976c8156a04662"/>
           <a:stretch xmlns:a="http://schemas.openxmlformats.org/drawingml/2006/main"/>
         </p:blipFill>
         <p:spPr>
@@ -11424,7 +11432,7 @@
           <p:cNvPr id="11" name="">
             <a:extLst xmlns:a="http://schemas.openxmlformats.org/drawingml/2006/main">
               <a:ext uri="{FF2B5EF4-FFF2-40B4-BE49-F238E27FC236}">
-                <a16:creationId xmlns:a16="http://schemas.microsoft.com/office/drawing/2014/main" id="{FF96BA62-4A09-412D-8555-9C854B351918}"/>
+                <a16:creationId xmlns:a16="http://schemas.microsoft.com/office/drawing/2014/main" id="{16EA28C0-D84B-4DD0-972B-A1D0FD3F985A}"/>
               </a:ext>
             </a:extLst>
           </p:cNvPr>
@@ -11481,7 +11489,7 @@
           <p:cNvPr id="12" name="">
             <a:extLst xmlns:a="http://schemas.openxmlformats.org/drawingml/2006/main">
               <a:ext uri="{FF2B5EF4-FFF2-40B4-BE49-F238E27FC236}">
-                <a16:creationId xmlns:a16="http://schemas.microsoft.com/office/drawing/2014/main" id="{CAE93876-46BE-4705-8914-4BCAB509CDAF}"/>
+                <a16:creationId xmlns:a16="http://schemas.microsoft.com/office/drawing/2014/main" id="{6AD65748-924D-4B26-A8FC-DB14812DDB9E}"/>
               </a:ext>
             </a:extLst>
           </p:cNvPr>
@@ -11538,7 +11546,7 @@
           <p:cNvPr id="13" name="">
             <a:extLst xmlns:a="http://schemas.openxmlformats.org/drawingml/2006/main">
               <a:ext uri="{FF2B5EF4-FFF2-40B4-BE49-F238E27FC236}">
-                <a16:creationId xmlns:a16="http://schemas.microsoft.com/office/drawing/2014/main" id="{79045E5D-F1A2-4C86-B115-9AE9A244D6C5}"/>
+                <a16:creationId xmlns:a16="http://schemas.microsoft.com/office/drawing/2014/main" id="{9AE0174F-8BAD-461B-A6DC-AA9A12892F7A}"/>
               </a:ext>
             </a:extLst>
           </p:cNvPr>
@@ -11570,7 +11578,7 @@
           <p:cNvPr id="14" name="">
             <a:extLst xmlns:a="http://schemas.openxmlformats.org/drawingml/2006/main">
               <a:ext uri="{FF2B5EF4-FFF2-40B4-BE49-F238E27FC236}">
-                <a16:creationId xmlns:a16="http://schemas.microsoft.com/office/drawing/2014/main" id="{B3FEFC1F-EA73-4DEA-AA2D-3DA22BD75E90}"/>
+                <a16:creationId xmlns:a16="http://schemas.microsoft.com/office/drawing/2014/main" id="{6D7D6651-920B-40F3-9555-6713918DBE17}"/>
               </a:ext>
             </a:extLst>
           </p:cNvPr>
@@ -11627,7 +11635,7 @@
           <p:cNvPr id="15" name="">
             <a:extLst xmlns:a="http://schemas.openxmlformats.org/drawingml/2006/main">
               <a:ext uri="{FF2B5EF4-FFF2-40B4-BE49-F238E27FC236}">
-                <a16:creationId xmlns:a16="http://schemas.microsoft.com/office/drawing/2014/main" id="{80628CFB-D0D1-40DB-8A94-27B5B4123043}"/>
+                <a16:creationId xmlns:a16="http://schemas.microsoft.com/office/drawing/2014/main" id="{D71135C5-F7A5-4E83-AFF2-33D1011B49F1}"/>
               </a:ext>
             </a:extLst>
           </p:cNvPr>
@@ -11682,7 +11690,7 @@
     </p:spTree>
     <p:extLst>
       <p:ext uri="{BB962C8B-B14F-4D97-AF65-F5344CB8AC3E}">
-        <p14:creationId xmlns:p14="http://schemas.microsoft.com/office/powerpoint/2010/main" val="836072616"/>
+        <p14:creationId xmlns:p14="http://schemas.microsoft.com/office/powerpoint/2010/main" val="872930375"/>
       </p:ext>
     </p:extLst>
   </p:cSld>
@@ -11837,7 +11845,7 @@
           <p:cNvPr id="23" name="">
             <a:extLst xmlns:a="http://schemas.openxmlformats.org/drawingml/2006/main">
               <a:ext uri="{FF2B5EF4-FFF2-40B4-BE49-F238E27FC236}">
-                <a16:creationId xmlns:a16="http://schemas.microsoft.com/office/drawing/2014/main" id="{8CA40C4A-6D50-4FB8-9C22-EA7727A966D0}"/>
+                <a16:creationId xmlns:a16="http://schemas.microsoft.com/office/drawing/2014/main" id="{41F68758-7F8B-4D9C-A1C9-2CA27BBC018D}"/>
               </a:ext>
             </a:extLst>
           </p:cNvPr>
@@ -11869,7 +11877,7 @@
           <p:cNvPr id="2" name="">
             <a:extLst xmlns:a="http://schemas.openxmlformats.org/drawingml/2006/main">
               <a:ext uri="{FF2B5EF4-FFF2-40B4-BE49-F238E27FC236}">
-                <a16:creationId xmlns:a16="http://schemas.microsoft.com/office/drawing/2014/main" id="{48849EE7-256D-4FFE-8AEB-50D906FE483B}"/>
+                <a16:creationId xmlns:a16="http://schemas.microsoft.com/office/drawing/2014/main" id="{81E3848C-5BDB-4AE4-93E1-4722F8ABC076}"/>
               </a:ext>
             </a:extLst>
           </p:cNvPr>
@@ -11926,7 +11934,7 @@
           <p:cNvPr id="3" name="">
             <a:extLst xmlns:a="http://schemas.openxmlformats.org/drawingml/2006/main">
               <a:ext uri="{FF2B5EF4-FFF2-40B4-BE49-F238E27FC236}">
-                <a16:creationId xmlns:a16="http://schemas.microsoft.com/office/drawing/2014/main" id="{B238C877-C25E-4B02-9983-662E5CA54107}"/>
+                <a16:creationId xmlns:a16="http://schemas.microsoft.com/office/drawing/2014/main" id="{962FB5CA-5755-42BD-A40F-8F4A6064E35F}"/>
               </a:ext>
             </a:extLst>
           </p:cNvPr>
@@ -11958,7 +11966,7 @@
           <p:cNvPr id="4" name="">
             <a:extLst xmlns:a="http://schemas.openxmlformats.org/drawingml/2006/main">
               <a:ext uri="{FF2B5EF4-FFF2-40B4-BE49-F238E27FC236}">
-                <a16:creationId xmlns:a16="http://schemas.microsoft.com/office/drawing/2014/main" id="{E4FE5701-851F-4702-A93B-DBBC0ABA20E5}"/>
+                <a16:creationId xmlns:a16="http://schemas.microsoft.com/office/drawing/2014/main" id="{C45ADD96-26CF-4F55-8EEC-F1854F63A958}"/>
               </a:ext>
             </a:extLst>
           </p:cNvPr>
@@ -12015,7 +12023,7 @@
           <p:cNvPr id="5" name="">
             <a:extLst xmlns:a="http://schemas.openxmlformats.org/drawingml/2006/main">
               <a:ext uri="{FF2B5EF4-FFF2-40B4-BE49-F238E27FC236}">
-                <a16:creationId xmlns:a16="http://schemas.microsoft.com/office/drawing/2014/main" id="{6BC9FAF2-2ED2-4582-A7B9-B6BB66D98CF5}"/>
+                <a16:creationId xmlns:a16="http://schemas.microsoft.com/office/drawing/2014/main" id="{9D187041-C807-44BF-9DD1-4381F768FC8E}"/>
               </a:ext>
             </a:extLst>
           </p:cNvPr>
@@ -12072,7 +12080,7 @@
           <p:cNvPr id="6" name="">
             <a:extLst xmlns:a="http://schemas.openxmlformats.org/drawingml/2006/main">
               <a:ext uri="{FF2B5EF4-FFF2-40B4-BE49-F238E27FC236}">
-                <a16:creationId xmlns:a16="http://schemas.microsoft.com/office/drawing/2014/main" id="{DB7911B7-B353-425A-B01B-4945C1A377FA}"/>
+                <a16:creationId xmlns:a16="http://schemas.microsoft.com/office/drawing/2014/main" id="{A9918D2B-4153-44F1-8B22-06057849F237}"/>
               </a:ext>
             </a:extLst>
           </p:cNvPr>
@@ -12129,7 +12137,7 @@
           <p:cNvPr id="7" name="">
             <a:extLst xmlns:a="http://schemas.openxmlformats.org/drawingml/2006/main">
               <a:ext uri="{FF2B5EF4-FFF2-40B4-BE49-F238E27FC236}">
-                <a16:creationId xmlns:a16="http://schemas.microsoft.com/office/drawing/2014/main" id="{4FE26A31-B6EA-4936-AA78-4BF965C9417A}"/>
+                <a16:creationId xmlns:a16="http://schemas.microsoft.com/office/drawing/2014/main" id="{6BF7D281-EB4D-4D23-B171-8D22A35ACC67}"/>
               </a:ext>
             </a:extLst>
           </p:cNvPr>
@@ -12161,7 +12169,7 @@
           <p:cNvPr id="8" name="">
             <a:extLst xmlns:a="http://schemas.openxmlformats.org/drawingml/2006/main">
               <a:ext uri="{FF2B5EF4-FFF2-40B4-BE49-F238E27FC236}">
-                <a16:creationId xmlns:a16="http://schemas.microsoft.com/office/drawing/2014/main" id="{A19DF52E-0BC1-4B64-AD43-D7BC31966C26}"/>
+                <a16:creationId xmlns:a16="http://schemas.microsoft.com/office/drawing/2014/main" id="{D4B90234-18F6-4772-AEDB-D9223D058A76}"/>
               </a:ext>
             </a:extLst>
           </p:cNvPr>
@@ -12218,7 +12226,7 @@
           <p:cNvPr id="9" name="">
             <a:extLst xmlns:a="http://schemas.openxmlformats.org/drawingml/2006/main">
               <a:ext uri="{FF2B5EF4-FFF2-40B4-BE49-F238E27FC236}">
-                <a16:creationId xmlns:a16="http://schemas.microsoft.com/office/drawing/2014/main" id="{ABB27540-5ABB-43E4-8F34-045926B11475}"/>
+                <a16:creationId xmlns:a16="http://schemas.microsoft.com/office/drawing/2014/main" id="{25ED631B-7743-41AF-A6C2-99409ED1A02F}"/>
               </a:ext>
             </a:extLst>
           </p:cNvPr>
@@ -12275,7 +12283,7 @@
           <p:cNvPr id="10" name="">
             <a:extLst xmlns:a="http://schemas.openxmlformats.org/drawingml/2006/main">
               <a:ext uri="{FF2B5EF4-FFF2-40B4-BE49-F238E27FC236}">
-                <a16:creationId xmlns:a16="http://schemas.microsoft.com/office/drawing/2014/main" id="{C748F59D-C41A-48D6-8D8C-334B48D88DBA}"/>
+                <a16:creationId xmlns:a16="http://schemas.microsoft.com/office/drawing/2014/main" id="{7D0A367D-E6B3-4D58-9883-9713F8DFBA20}"/>
               </a:ext>
             </a:extLst>
           </p:cNvPr>
@@ -12309,7 +12317,7 @@
           <p:cNvPr id="11" name="">
             <a:extLst xmlns:a="http://schemas.openxmlformats.org/drawingml/2006/main">
               <a:ext uri="{FF2B5EF4-FFF2-40B4-BE49-F238E27FC236}">
-                <a16:creationId xmlns:a16="http://schemas.microsoft.com/office/drawing/2014/main" id="{ACFAF0CA-9D7A-43D3-81D4-2D926C8C63F6}"/>
+                <a16:creationId xmlns:a16="http://schemas.microsoft.com/office/drawing/2014/main" id="{93DABBCF-53E6-468C-9A03-CDDB6285ABA3}"/>
               </a:ext>
             </a:extLst>
           </p:cNvPr>
@@ -12341,7 +12349,7 @@
           <p:cNvPr id="12" name="">
             <a:extLst xmlns:a="http://schemas.openxmlformats.org/drawingml/2006/main">
               <a:ext uri="{FF2B5EF4-FFF2-40B4-BE49-F238E27FC236}">
-                <a16:creationId xmlns:a16="http://schemas.microsoft.com/office/drawing/2014/main" id="{2D1CAF4F-116E-4D7D-BF14-8468397B46C9}"/>
+                <a16:creationId xmlns:a16="http://schemas.microsoft.com/office/drawing/2014/main" id="{1FAA84AA-B228-41D8-AD6B-7B49FADF9AA8}"/>
               </a:ext>
             </a:extLst>
           </p:cNvPr>
@@ -12398,7 +12406,7 @@
           <p:cNvPr id="13" name="">
             <a:extLst xmlns:a="http://schemas.openxmlformats.org/drawingml/2006/main">
               <a:ext uri="{FF2B5EF4-FFF2-40B4-BE49-F238E27FC236}">
-                <a16:creationId xmlns:a16="http://schemas.microsoft.com/office/drawing/2014/main" id="{3EF668A9-A02B-4609-B137-4A120570E79A}"/>
+                <a16:creationId xmlns:a16="http://schemas.microsoft.com/office/drawing/2014/main" id="{1E6BDC6F-0F6B-46EE-A6F0-038C8B704D37}"/>
               </a:ext>
             </a:extLst>
           </p:cNvPr>
@@ -12455,7 +12463,7 @@
           <p:cNvPr id="14" name="">
             <a:extLst xmlns:a="http://schemas.openxmlformats.org/drawingml/2006/main">
               <a:ext uri="{FF2B5EF4-FFF2-40B4-BE49-F238E27FC236}">
-                <a16:creationId xmlns:a16="http://schemas.microsoft.com/office/drawing/2014/main" id="{08B18D47-B2EE-477D-AF0F-7F519B58DFA2}"/>
+                <a16:creationId xmlns:a16="http://schemas.microsoft.com/office/drawing/2014/main" id="{F65431F2-B106-46A4-A534-3BF111A927C9}"/>
               </a:ext>
             </a:extLst>
           </p:cNvPr>
@@ -12489,7 +12497,7 @@
           <p:cNvPr id="15" name="">
             <a:extLst xmlns:a="http://schemas.openxmlformats.org/drawingml/2006/main">
               <a:ext uri="{FF2B5EF4-FFF2-40B4-BE49-F238E27FC236}">
-                <a16:creationId xmlns:a16="http://schemas.microsoft.com/office/drawing/2014/main" id="{566E91F3-1E25-44C5-AAE4-4EE29A9006F7}"/>
+                <a16:creationId xmlns:a16="http://schemas.microsoft.com/office/drawing/2014/main" id="{3D2AF022-8860-4199-B4A5-6C5F2FFA86B3}"/>
               </a:ext>
             </a:extLst>
           </p:cNvPr>
@@ -12521,7 +12529,7 @@
           <p:cNvPr id="16" name="">
             <a:extLst xmlns:a="http://schemas.openxmlformats.org/drawingml/2006/main">
               <a:ext uri="{FF2B5EF4-FFF2-40B4-BE49-F238E27FC236}">
-                <a16:creationId xmlns:a16="http://schemas.microsoft.com/office/drawing/2014/main" id="{61ADA260-A01F-4666-B2CB-BC6A87559059}"/>
+                <a16:creationId xmlns:a16="http://schemas.microsoft.com/office/drawing/2014/main" id="{2FC23AC9-140C-486A-9D44-D002D44D269B}"/>
               </a:ext>
             </a:extLst>
           </p:cNvPr>
@@ -12578,7 +12586,7 @@
           <p:cNvPr id="17" name="">
             <a:extLst xmlns:a="http://schemas.openxmlformats.org/drawingml/2006/main">
               <a:ext uri="{FF2B5EF4-FFF2-40B4-BE49-F238E27FC236}">
-                <a16:creationId xmlns:a16="http://schemas.microsoft.com/office/drawing/2014/main" id="{45083332-4BFC-4E12-A1E3-12C8A03132BA}"/>
+                <a16:creationId xmlns:a16="http://schemas.microsoft.com/office/drawing/2014/main" id="{DAE5247C-DEA5-400E-8157-5AFFF4D1D662}"/>
               </a:ext>
             </a:extLst>
           </p:cNvPr>
@@ -12635,7 +12643,7 @@
           <p:cNvPr id="18" name="">
             <a:extLst xmlns:a="http://schemas.openxmlformats.org/drawingml/2006/main">
               <a:ext uri="{FF2B5EF4-FFF2-40B4-BE49-F238E27FC236}">
-                <a16:creationId xmlns:a16="http://schemas.microsoft.com/office/drawing/2014/main" id="{CC0EB6D6-C679-4512-A45B-06F8C5EF1FBC}"/>
+                <a16:creationId xmlns:a16="http://schemas.microsoft.com/office/drawing/2014/main" id="{4B18B687-D4F1-42D8-9D5A-9ADB9E9105F3}"/>
               </a:ext>
             </a:extLst>
           </p:cNvPr>
@@ -12669,7 +12677,7 @@
           <p:cNvPr id="19" name="">
             <a:extLst xmlns:a="http://schemas.openxmlformats.org/drawingml/2006/main">
               <a:ext uri="{FF2B5EF4-FFF2-40B4-BE49-F238E27FC236}">
-                <a16:creationId xmlns:a16="http://schemas.microsoft.com/office/drawing/2014/main" id="{FBB5CAC0-370F-4D87-9F5B-C595C9EF1264}"/>
+                <a16:creationId xmlns:a16="http://schemas.microsoft.com/office/drawing/2014/main" id="{D2431BAC-0E5E-477A-A53F-6A78B832A5F7}"/>
               </a:ext>
             </a:extLst>
           </p:cNvPr>
@@ -12701,7 +12709,7 @@
           <p:cNvPr id="20" name="">
             <a:extLst xmlns:a="http://schemas.openxmlformats.org/drawingml/2006/main">
               <a:ext uri="{FF2B5EF4-FFF2-40B4-BE49-F238E27FC236}">
-                <a16:creationId xmlns:a16="http://schemas.microsoft.com/office/drawing/2014/main" id="{8EDCF9CA-2B16-4485-98C7-AE11A9C58253}"/>
+                <a16:creationId xmlns:a16="http://schemas.microsoft.com/office/drawing/2014/main" id="{C8EBD8C1-4E93-478D-9750-9A629B5D8F6E}"/>
               </a:ext>
             </a:extLst>
           </p:cNvPr>
@@ -12758,7 +12766,7 @@
           <p:cNvPr id="21" name="">
             <a:extLst xmlns:a="http://schemas.openxmlformats.org/drawingml/2006/main">
               <a:ext uri="{FF2B5EF4-FFF2-40B4-BE49-F238E27FC236}">
-                <a16:creationId xmlns:a16="http://schemas.microsoft.com/office/drawing/2014/main" id="{F571024A-19E1-4275-A97E-B88D07C5A624}"/>
+                <a16:creationId xmlns:a16="http://schemas.microsoft.com/office/drawing/2014/main" id="{B1FED4AE-5223-4C20-B353-A2D77648741A}"/>
               </a:ext>
             </a:extLst>
           </p:cNvPr>
@@ -12815,7 +12823,7 @@
           <p:cNvPr id="22" name="">
             <a:extLst xmlns:a="http://schemas.openxmlformats.org/drawingml/2006/main">
               <a:ext uri="{FF2B5EF4-FFF2-40B4-BE49-F238E27FC236}">
-                <a16:creationId xmlns:a16="http://schemas.microsoft.com/office/drawing/2014/main" id="{2BDA7F79-CA22-47DE-A400-4AE3F11D101B}"/>
+                <a16:creationId xmlns:a16="http://schemas.microsoft.com/office/drawing/2014/main" id="{E8F731BE-7C34-41CC-850A-B4E23E9773DC}"/>
               </a:ext>
             </a:extLst>
           </p:cNvPr>
@@ -12870,7 +12878,7 @@
     </p:spTree>
     <p:extLst>
       <p:ext uri="{BB962C8B-B14F-4D97-AF65-F5344CB8AC3E}">
-        <p14:creationId xmlns:p14="http://schemas.microsoft.com/office/powerpoint/2010/main" val="226614338"/>
+        <p14:creationId xmlns:p14="http://schemas.microsoft.com/office/powerpoint/2010/main" val="18326284"/>
       </p:ext>
     </p:extLst>
   </p:cSld>
@@ -13071,7 +13079,7 @@
           <p:cNvPr id="22" name="">
             <a:extLst xmlns:a="http://schemas.openxmlformats.org/drawingml/2006/main">
               <a:ext uri="{FF2B5EF4-FFF2-40B4-BE49-F238E27FC236}">
-                <a16:creationId xmlns:a16="http://schemas.microsoft.com/office/drawing/2014/main" id="{A4897CEC-5977-48FC-A861-8FD3E227ADD2}"/>
+                <a16:creationId xmlns:a16="http://schemas.microsoft.com/office/drawing/2014/main" id="{5B52E7CC-6553-45EF-A9B1-C287E3C09300}"/>
               </a:ext>
             </a:extLst>
           </p:cNvPr>
@@ -13103,7 +13111,7 @@
           <p:cNvPr id="2" name="">
             <a:extLst xmlns:a="http://schemas.openxmlformats.org/drawingml/2006/main">
               <a:ext uri="{FF2B5EF4-FFF2-40B4-BE49-F238E27FC236}">
-                <a16:creationId xmlns:a16="http://schemas.microsoft.com/office/drawing/2014/main" id="{333E7087-245C-4A1B-94FA-A15E967D37B6}"/>
+                <a16:creationId xmlns:a16="http://schemas.microsoft.com/office/drawing/2014/main" id="{86A033CD-AE6F-4577-A546-4E218F5C95E0}"/>
               </a:ext>
             </a:extLst>
           </p:cNvPr>
@@ -13160,7 +13168,7 @@
           <p:cNvPr id="3" name="">
             <a:extLst xmlns:a="http://schemas.openxmlformats.org/drawingml/2006/main">
               <a:ext uri="{FF2B5EF4-FFF2-40B4-BE49-F238E27FC236}">
-                <a16:creationId xmlns:a16="http://schemas.microsoft.com/office/drawing/2014/main" id="{C24A1362-0208-45B2-8B2E-F19CD5604FBB}"/>
+                <a16:creationId xmlns:a16="http://schemas.microsoft.com/office/drawing/2014/main" id="{046CC1D8-34FF-46C2-B8D6-EE6C929C0AF6}"/>
               </a:ext>
             </a:extLst>
           </p:cNvPr>
@@ -13192,7 +13200,7 @@
           <p:cNvPr id="4" name="">
             <a:extLst xmlns:a="http://schemas.openxmlformats.org/drawingml/2006/main">
               <a:ext uri="{FF2B5EF4-FFF2-40B4-BE49-F238E27FC236}">
-                <a16:creationId xmlns:a16="http://schemas.microsoft.com/office/drawing/2014/main" id="{F48E990C-A70E-4BAB-9446-E1B61F566962}"/>
+                <a16:creationId xmlns:a16="http://schemas.microsoft.com/office/drawing/2014/main" id="{31C2CF26-1949-4F00-9E4E-BA5FD812E377}"/>
               </a:ext>
             </a:extLst>
           </p:cNvPr>
@@ -13249,7 +13257,7 @@
           <p:cNvPr id="5" name="">
             <a:extLst xmlns:a="http://schemas.openxmlformats.org/drawingml/2006/main">
               <a:ext uri="{FF2B5EF4-FFF2-40B4-BE49-F238E27FC236}">
-                <a16:creationId xmlns:a16="http://schemas.microsoft.com/office/drawing/2014/main" id="{8AD7B868-3C3A-476C-83E0-11D30172406D}"/>
+                <a16:creationId xmlns:a16="http://schemas.microsoft.com/office/drawing/2014/main" id="{30552054-D353-45E3-BDF8-E5E8C7C4B9B9}"/>
               </a:ext>
             </a:extLst>
           </p:cNvPr>
@@ -13306,7 +13314,7 @@
           <p:cNvPr id="6" name="">
             <a:extLst xmlns:a="http://schemas.openxmlformats.org/drawingml/2006/main">
               <a:ext uri="{FF2B5EF4-FFF2-40B4-BE49-F238E27FC236}">
-                <a16:creationId xmlns:a16="http://schemas.microsoft.com/office/drawing/2014/main" id="{1AC2B809-4A8C-4D51-88C5-ED47EDED1D89}"/>
+                <a16:creationId xmlns:a16="http://schemas.microsoft.com/office/drawing/2014/main" id="{F15DDCD1-92BF-46DF-97A8-4BBD08CE85D4}"/>
               </a:ext>
             </a:extLst>
           </p:cNvPr>
@@ -13363,7 +13371,7 @@
           <p:cNvPr id="7" name="">
             <a:extLst xmlns:a="http://schemas.openxmlformats.org/drawingml/2006/main">
               <a:ext uri="{FF2B5EF4-FFF2-40B4-BE49-F238E27FC236}">
-                <a16:creationId xmlns:a16="http://schemas.microsoft.com/office/drawing/2014/main" id="{BAC0973D-1E11-46B5-ABAE-B1DC5B213B43}"/>
+                <a16:creationId xmlns:a16="http://schemas.microsoft.com/office/drawing/2014/main" id="{E2A4EB66-1028-4EDF-8D25-6547310CE300}"/>
               </a:ext>
             </a:extLst>
           </p:cNvPr>
@@ -13395,7 +13403,7 @@
           <p:cNvPr id="8" name="">
             <a:extLst xmlns:a="http://schemas.openxmlformats.org/drawingml/2006/main">
               <a:ext uri="{FF2B5EF4-FFF2-40B4-BE49-F238E27FC236}">
-                <a16:creationId xmlns:a16="http://schemas.microsoft.com/office/drawing/2014/main" id="{F17E4215-D600-4F69-8FD8-2DC80EE3420B}"/>
+                <a16:creationId xmlns:a16="http://schemas.microsoft.com/office/drawing/2014/main" id="{B22EB19F-32BA-42F4-A35B-3CBD7894324A}"/>
               </a:ext>
             </a:extLst>
           </p:cNvPr>
@@ -13452,7 +13460,7 @@
           <p:cNvPr id="9" name="">
             <a:extLst xmlns:a="http://schemas.openxmlformats.org/drawingml/2006/main">
               <a:ext uri="{FF2B5EF4-FFF2-40B4-BE49-F238E27FC236}">
-                <a16:creationId xmlns:a16="http://schemas.microsoft.com/office/drawing/2014/main" id="{EFC2B7F5-82A4-499E-A18F-9A5F6540CD61}"/>
+                <a16:creationId xmlns:a16="http://schemas.microsoft.com/office/drawing/2014/main" id="{089B5CF4-6BF4-42C8-A7D5-620EEE5FC8B6}"/>
               </a:ext>
             </a:extLst>
           </p:cNvPr>
@@ -13509,7 +13517,7 @@
           <p:cNvPr id="10" name="">
             <a:extLst xmlns:a="http://schemas.openxmlformats.org/drawingml/2006/main">
               <a:ext uri="{FF2B5EF4-FFF2-40B4-BE49-F238E27FC236}">
-                <a16:creationId xmlns:a16="http://schemas.microsoft.com/office/drawing/2014/main" id="{BC6BCA33-68BE-4F67-AEA1-830EEC36CFBC}"/>
+                <a16:creationId xmlns:a16="http://schemas.microsoft.com/office/drawing/2014/main" id="{18416ED8-183B-42C1-A31B-55C909776951}"/>
               </a:ext>
             </a:extLst>
           </p:cNvPr>
@@ -13543,7 +13551,7 @@
           <p:cNvPr id="11" name="">
             <a:extLst xmlns:a="http://schemas.openxmlformats.org/drawingml/2006/main">
               <a:ext uri="{FF2B5EF4-FFF2-40B4-BE49-F238E27FC236}">
-                <a16:creationId xmlns:a16="http://schemas.microsoft.com/office/drawing/2014/main" id="{CC38166C-56EE-4334-ABB3-A021FFDCC750}"/>
+                <a16:creationId xmlns:a16="http://schemas.microsoft.com/office/drawing/2014/main" id="{1691C6E5-A437-4191-8BC7-A0FD120CE01F}"/>
               </a:ext>
             </a:extLst>
           </p:cNvPr>
@@ -13575,7 +13583,7 @@
           <p:cNvPr id="12" name="">
             <a:extLst xmlns:a="http://schemas.openxmlformats.org/drawingml/2006/main">
               <a:ext uri="{FF2B5EF4-FFF2-40B4-BE49-F238E27FC236}">
-                <a16:creationId xmlns:a16="http://schemas.microsoft.com/office/drawing/2014/main" id="{A348DC89-DBC1-4A58-8596-3A942D85E81F}"/>
+                <a16:creationId xmlns:a16="http://schemas.microsoft.com/office/drawing/2014/main" id="{B45CE398-B3F9-4114-9CFF-BF368979ACE5}"/>
               </a:ext>
             </a:extLst>
           </p:cNvPr>
@@ -13632,7 +13640,7 @@
           <p:cNvPr id="13" name="">
             <a:extLst xmlns:a="http://schemas.openxmlformats.org/drawingml/2006/main">
               <a:ext uri="{FF2B5EF4-FFF2-40B4-BE49-F238E27FC236}">
-                <a16:creationId xmlns:a16="http://schemas.microsoft.com/office/drawing/2014/main" id="{B1FDC286-7A5D-4511-9E24-A79E52277D05}"/>
+                <a16:creationId xmlns:a16="http://schemas.microsoft.com/office/drawing/2014/main" id="{3A198C11-99D7-4DCD-830C-E069EEAE5473}"/>
               </a:ext>
             </a:extLst>
           </p:cNvPr>
@@ -13689,7 +13697,7 @@
           <p:cNvPr id="14" name="">
             <a:extLst xmlns:a="http://schemas.openxmlformats.org/drawingml/2006/main">
               <a:ext uri="{FF2B5EF4-FFF2-40B4-BE49-F238E27FC236}">
-                <a16:creationId xmlns:a16="http://schemas.microsoft.com/office/drawing/2014/main" id="{BF229A02-5222-4D41-8D8B-3ACA85C22DAB}"/>
+                <a16:creationId xmlns:a16="http://schemas.microsoft.com/office/drawing/2014/main" id="{3D4C4C92-8185-4736-9121-FD729979FF58}"/>
               </a:ext>
             </a:extLst>
           </p:cNvPr>
@@ -13723,7 +13731,7 @@
           <p:cNvPr id="15" name="">
             <a:extLst xmlns:a="http://schemas.openxmlformats.org/drawingml/2006/main">
               <a:ext uri="{FF2B5EF4-FFF2-40B4-BE49-F238E27FC236}">
-                <a16:creationId xmlns:a16="http://schemas.microsoft.com/office/drawing/2014/main" id="{9AC73E83-E89C-45D7-ADA4-B1C27CFA1401}"/>
+                <a16:creationId xmlns:a16="http://schemas.microsoft.com/office/drawing/2014/main" id="{CDAAC4FF-8BEC-40E3-BA2C-C17999939530}"/>
               </a:ext>
             </a:extLst>
           </p:cNvPr>
@@ -13755,7 +13763,7 @@
           <p:cNvPr id="16" name="">
             <a:extLst xmlns:a="http://schemas.openxmlformats.org/drawingml/2006/main">
               <a:ext uri="{FF2B5EF4-FFF2-40B4-BE49-F238E27FC236}">
-                <a16:creationId xmlns:a16="http://schemas.microsoft.com/office/drawing/2014/main" id="{70A6AFD3-6C88-4987-A406-043AF0B1794E}"/>
+                <a16:creationId xmlns:a16="http://schemas.microsoft.com/office/drawing/2014/main" id="{82F722BF-B81C-4D7B-B256-175629E53097}"/>
               </a:ext>
             </a:extLst>
           </p:cNvPr>
@@ -13812,7 +13820,7 @@
           <p:cNvPr id="17" name="">
             <a:extLst xmlns:a="http://schemas.openxmlformats.org/drawingml/2006/main">
               <a:ext uri="{FF2B5EF4-FFF2-40B4-BE49-F238E27FC236}">
-                <a16:creationId xmlns:a16="http://schemas.microsoft.com/office/drawing/2014/main" id="{CA5A8484-46F0-413D-89CB-A376DFA3E0D1}"/>
+                <a16:creationId xmlns:a16="http://schemas.microsoft.com/office/drawing/2014/main" id="{266C2113-4172-45C3-BECE-2DEF1E57649E}"/>
               </a:ext>
             </a:extLst>
           </p:cNvPr>
@@ -13869,7 +13877,7 @@
           <p:cNvPr id="18" name="">
             <a:extLst xmlns:a="http://schemas.openxmlformats.org/drawingml/2006/main">
               <a:ext uri="{FF2B5EF4-FFF2-40B4-BE49-F238E27FC236}">
-                <a16:creationId xmlns:a16="http://schemas.microsoft.com/office/drawing/2014/main" id="{AE872078-EC27-4653-81AA-14610C0DDFE5}"/>
+                <a16:creationId xmlns:a16="http://schemas.microsoft.com/office/drawing/2014/main" id="{401FC6B4-BC41-49FC-A31C-68979DAAFCCF}"/>
               </a:ext>
             </a:extLst>
           </p:cNvPr>
@@ -13903,7 +13911,7 @@
           <p:cNvPr id="19" name="">
             <a:extLst xmlns:a="http://schemas.openxmlformats.org/drawingml/2006/main">
               <a:ext uri="{FF2B5EF4-FFF2-40B4-BE49-F238E27FC236}">
-                <a16:creationId xmlns:a16="http://schemas.microsoft.com/office/drawing/2014/main" id="{4DEE6B77-8435-4283-89C5-DF62C6242AC1}"/>
+                <a16:creationId xmlns:a16="http://schemas.microsoft.com/office/drawing/2014/main" id="{FA1FFF54-D292-4D6D-B801-141903CD47D4}"/>
               </a:ext>
             </a:extLst>
           </p:cNvPr>
@@ -13935,7 +13943,7 @@
           <p:cNvPr id="20" name="">
             <a:extLst xmlns:a="http://schemas.openxmlformats.org/drawingml/2006/main">
               <a:ext uri="{FF2B5EF4-FFF2-40B4-BE49-F238E27FC236}">
-                <a16:creationId xmlns:a16="http://schemas.microsoft.com/office/drawing/2014/main" id="{1550C89F-12A4-4204-9EFC-B9AEA9D53129}"/>
+                <a16:creationId xmlns:a16="http://schemas.microsoft.com/office/drawing/2014/main" id="{098986C5-7386-446E-A297-ABF061DC19CE}"/>
               </a:ext>
             </a:extLst>
           </p:cNvPr>
@@ -13992,7 +14000,7 @@
           <p:cNvPr id="21" name="">
             <a:extLst xmlns:a="http://schemas.openxmlformats.org/drawingml/2006/main">
               <a:ext uri="{FF2B5EF4-FFF2-40B4-BE49-F238E27FC236}">
-                <a16:creationId xmlns:a16="http://schemas.microsoft.com/office/drawing/2014/main" id="{E03776A3-ECFD-4B5C-A4B3-D763EF948C8A}"/>
+                <a16:creationId xmlns:a16="http://schemas.microsoft.com/office/drawing/2014/main" id="{2FAF594C-68FA-40E9-84F9-27ECA32DE200}"/>
               </a:ext>
             </a:extLst>
           </p:cNvPr>
@@ -14047,7 +14055,7 @@
     </p:spTree>
     <p:extLst>
       <p:ext uri="{BB962C8B-B14F-4D97-AF65-F5344CB8AC3E}">
-        <p14:creationId xmlns:p14="http://schemas.microsoft.com/office/powerpoint/2010/main" val="1923919517"/>
+        <p14:creationId xmlns:p14="http://schemas.microsoft.com/office/powerpoint/2010/main" val="530353236"/>
       </p:ext>
     </p:extLst>
   </p:cSld>
